--- a/original-card-template.pptx
+++ b/original-card-template.pptx
@@ -1026,7 +1026,7 @@
         </p:nvSpPr>
         <p:spPr>
           <a:xfrm>
-            <a:off x="909828" y="708660"/>
+            <a:off x="900684" y="708660"/>
             <a:ext cx="914400" cy="274320"/>
           </a:xfrm>
           <a:prstGeom prst="rect">
@@ -1036,24 +1036,24 @@
           <a:ln/>
         </p:spPr>
         <p:txBody>
-          <a:bodyPr wrap="square" lIns="0" tIns="0" rIns="0" bIns="0" rtlCol="0" anchor="ctr"/>
+          <a:bodyPr wrap="none" lIns="0" tIns="0" rIns="0" bIns="0" rtlCol="0" anchor="ctr"/>
           <a:lstStyle/>
           <a:p>
             <a:pPr indent="0" marL="0">
               <a:buNone/>
             </a:pPr>
             <a:r>
-              <a:rPr lang="en-US" sz="1500" b="1" dirty="0">
-                <a:solidFill>
-                  <a:srgbClr val="222222"/>
-                </a:solidFill>
-                <a:latin typeface="Meiryo" pitchFamily="34" charset="0"/>
-                <a:ea typeface="Meiryo" pitchFamily="34" charset="-122"/>
-                <a:cs typeface="Meiryo" pitchFamily="34" charset="-120"/>
-              </a:rPr>
-              <a:t>なまえ</a:t>
-            </a:r>
-            <a:endParaRPr lang="en-US" sz="1500" dirty="0"/>
+              <a:rPr lang="en-US" sz="1100" b="1" dirty="0">
+                <a:solidFill>
+                  <a:srgbClr val="222222"/>
+                </a:solidFill>
+                <a:latin typeface="Meiryo" pitchFamily="34" charset="0"/>
+                <a:ea typeface="Meiryo" pitchFamily="34" charset="-122"/>
+                <a:cs typeface="Meiryo" pitchFamily="34" charset="-120"/>
+              </a:rPr>
+              <a:t>ひふきトカゲ</a:t>
+            </a:r>
+            <a:endParaRPr lang="en-US" sz="1100" dirty="0"/>
           </a:p>
         </p:txBody>
       </p:sp>
@@ -1090,7 +1090,7 @@
                 <a:ea typeface="Meiryo" pitchFamily="34" charset="-122"/>
                 <a:cs typeface="Meiryo" pitchFamily="34" charset="-120"/>
               </a:rPr>
-              <a:t>HP 70</a:t>
+              <a:t>HP 60</a:t>
             </a:r>
             <a:endParaRPr lang="en-US" sz="1200" dirty="0"/>
           </a:p>
@@ -1146,48 +1146,33 @@
           </a:ln>
         </p:spPr>
       </p:sp>
-      <p:sp>
-        <p:nvSpPr>
-          <p:cNvPr id="11" name="Text 9"/>
-          <p:cNvSpPr txBox="1"/>
-          <p:nvPr/>
-        </p:nvSpPr>
-        <p:spPr>
-          <a:xfrm>
-            <a:off x="553212" y="1010412"/>
-            <a:ext cx="1920240" cy="1225296"/>
-          </a:xfrm>
-          <a:prstGeom prst="rect">
-            <a:avLst/>
-          </a:prstGeom>
-          <a:noFill/>
-          <a:ln/>
-        </p:spPr>
-        <p:txBody>
-          <a:bodyPr wrap="square" lIns="0" tIns="0" rIns="0" bIns="0" rtlCol="0" anchor="ctr"/>
-          <a:lstStyle/>
-          <a:p>
-            <a:pPr algn="ctr" indent="0" marL="0">
-              <a:buNone/>
-            </a:pPr>
-            <a:r>
-              <a:rPr lang="en-US" sz="1000" dirty="0">
-                <a:solidFill>
-                  <a:srgbClr val="AAAAAA"/>
-                </a:solidFill>
-                <a:latin typeface="Meiryo" pitchFamily="34" charset="0"/>
-                <a:ea typeface="Meiryo" pitchFamily="34" charset="-122"/>
-                <a:cs typeface="Meiryo" pitchFamily="34" charset="-120"/>
-              </a:rPr>
-              <a:t>ここに絵をかく・はる</a:t>
-            </a:r>
-            <a:endParaRPr lang="en-US" sz="1000" dirty="0"/>
-          </a:p>
-        </p:txBody>
-      </p:sp>
-      <p:sp>
-        <p:nvSpPr>
-          <p:cNvPr id="12" name="Shape 10"/>
+      <p:pic>
+        <p:nvPicPr>
+          <p:cNvPr id="11" name="Image 0" descr="c1.jpg">    </p:cNvPr>
+          <p:cNvPicPr>
+            <a:picLocks noChangeAspect="1"/>
+          </p:cNvPicPr>
+          <p:nvPr/>
+        </p:nvPicPr>
+        <p:blipFill>
+          <a:blip r:embed="rId1"/>
+          <a:stretch>
+            <a:fillRect/>
+          </a:stretch>
+        </p:blipFill>
+        <p:spPr>
+          <a:xfrm>
+            <a:off x="566928" y="1024128"/>
+            <a:ext cx="1892808" cy="1197864"/>
+          </a:xfrm>
+          <a:prstGeom prst="rect">
+            <a:avLst/>
+          </a:prstGeom>
+        </p:spPr>
+      </p:pic>
+      <p:sp>
+        <p:nvSpPr>
+          <p:cNvPr id="12" name="Shape 9"/>
           <p:cNvSpPr/>
           <p:nvPr/>
         </p:nvSpPr>
@@ -1212,7 +1197,7 @@
       </p:sp>
       <p:sp>
         <p:nvSpPr>
-          <p:cNvPr id="13" name="Text 11"/>
+          <p:cNvPr id="13" name="Text 10"/>
           <p:cNvSpPr txBox="1"/>
           <p:nvPr/>
         </p:nvSpPr>
@@ -1243,7 +1228,7 @@
                 <a:ea typeface="Meiryo" pitchFamily="34" charset="-122"/>
                 <a:cs typeface="Meiryo" pitchFamily="34" charset="-120"/>
               </a:rPr>
-              <a:t>ワザ名１</a:t>
+              <a:t>ひのこ</a:t>
             </a:r>
             <a:endParaRPr lang="en-US" sz="1200" dirty="0"/>
           </a:p>
@@ -1251,7 +1236,7 @@
       </p:sp>
       <p:sp>
         <p:nvSpPr>
-          <p:cNvPr id="14" name="Text 12"/>
+          <p:cNvPr id="14" name="Text 11"/>
           <p:cNvSpPr txBox="1"/>
           <p:nvPr/>
         </p:nvSpPr>
@@ -1282,7 +1267,7 @@
                 <a:ea typeface="Meiryo" pitchFamily="34" charset="-122"/>
                 <a:cs typeface="Meiryo" pitchFamily="34" charset="-120"/>
               </a:rPr>
-              <a:t>30</a:t>
+              <a:t>20</a:t>
             </a:r>
             <a:endParaRPr lang="en-US" sz="1400" dirty="0"/>
           </a:p>
@@ -1290,7 +1275,7 @@
       </p:sp>
       <p:sp>
         <p:nvSpPr>
-          <p:cNvPr id="15" name="Text 13"/>
+          <p:cNvPr id="15" name="Text 12"/>
           <p:cNvSpPr txBox="1"/>
           <p:nvPr/>
         </p:nvSpPr>
@@ -1321,7 +1306,7 @@
                 <a:ea typeface="Meiryo" pitchFamily="34" charset="-122"/>
                 <a:cs typeface="Meiryo" pitchFamily="34" charset="-120"/>
               </a:rPr>
-              <a:t>せつめいをかく</a:t>
+              <a:t>ちいさなひをはく。</a:t>
             </a:r>
             <a:endParaRPr lang="en-US" sz="850" dirty="0"/>
           </a:p>
@@ -1329,7 +1314,7 @@
       </p:sp>
       <p:sp>
         <p:nvSpPr>
-          <p:cNvPr id="16" name="Shape 14"/>
+          <p:cNvPr id="16" name="Shape 13"/>
           <p:cNvSpPr/>
           <p:nvPr/>
         </p:nvSpPr>
@@ -1354,7 +1339,7 @@
       </p:sp>
       <p:sp>
         <p:nvSpPr>
-          <p:cNvPr id="17" name="Shape 15"/>
+          <p:cNvPr id="17" name="Shape 14"/>
           <p:cNvSpPr/>
           <p:nvPr/>
         </p:nvSpPr>
@@ -1379,7 +1364,7 @@
       </p:sp>
       <p:sp>
         <p:nvSpPr>
-          <p:cNvPr id="18" name="Text 16"/>
+          <p:cNvPr id="18" name="Text 15"/>
           <p:cNvSpPr txBox="1"/>
           <p:nvPr/>
         </p:nvSpPr>
@@ -1410,7 +1395,7 @@
                 <a:ea typeface="Meiryo" pitchFamily="34" charset="-122"/>
                 <a:cs typeface="Meiryo" pitchFamily="34" charset="-120"/>
               </a:rPr>
-              <a:t>ワザ名２</a:t>
+              <a:t>ほのおのしっぽ</a:t>
             </a:r>
             <a:endParaRPr lang="en-US" sz="1200" dirty="0"/>
           </a:p>
@@ -1418,7 +1403,7 @@
       </p:sp>
       <p:sp>
         <p:nvSpPr>
-          <p:cNvPr id="19" name="Text 17"/>
+          <p:cNvPr id="19" name="Text 16"/>
           <p:cNvSpPr txBox="1"/>
           <p:nvPr/>
         </p:nvSpPr>
@@ -1449,7 +1434,7 @@
                 <a:ea typeface="Meiryo" pitchFamily="34" charset="-122"/>
                 <a:cs typeface="Meiryo" pitchFamily="34" charset="-120"/>
               </a:rPr>
-              <a:t>60</a:t>
+              <a:t>50</a:t>
             </a:r>
             <a:endParaRPr lang="en-US" sz="1400" dirty="0"/>
           </a:p>
@@ -1457,7 +1442,7 @@
       </p:sp>
       <p:sp>
         <p:nvSpPr>
-          <p:cNvPr id="20" name="Text 18"/>
+          <p:cNvPr id="20" name="Text 17"/>
           <p:cNvSpPr txBox="1"/>
           <p:nvPr/>
         </p:nvSpPr>
@@ -1488,7 +1473,7 @@
                 <a:ea typeface="Meiryo" pitchFamily="34" charset="-122"/>
                 <a:cs typeface="Meiryo" pitchFamily="34" charset="-120"/>
               </a:rPr>
-              <a:t>せつめいをかく</a:t>
+              <a:t>しっぽのひでこうげき。</a:t>
             </a:r>
             <a:endParaRPr lang="en-US" sz="850" dirty="0"/>
           </a:p>
@@ -1496,7 +1481,7 @@
       </p:sp>
       <p:sp>
         <p:nvSpPr>
-          <p:cNvPr id="21" name="Shape 19"/>
+          <p:cNvPr id="21" name="Shape 18"/>
           <p:cNvSpPr/>
           <p:nvPr/>
         </p:nvSpPr>
@@ -1521,7 +1506,7 @@
       </p:sp>
       <p:sp>
         <p:nvSpPr>
-          <p:cNvPr id="22" name="Text 20"/>
+          <p:cNvPr id="22" name="Text 19"/>
           <p:cNvSpPr txBox="1"/>
           <p:nvPr/>
         </p:nvSpPr>
@@ -1560,7 +1545,7 @@
       </p:sp>
       <p:sp>
         <p:nvSpPr>
-          <p:cNvPr id="23" name="Shape 21"/>
+          <p:cNvPr id="23" name="Shape 20"/>
           <p:cNvSpPr/>
           <p:nvPr/>
         </p:nvSpPr>
@@ -1585,7 +1570,7 @@
       </p:sp>
       <p:sp>
         <p:nvSpPr>
-          <p:cNvPr id="24" name="Text 22"/>
+          <p:cNvPr id="24" name="Text 21"/>
           <p:cNvSpPr txBox="1"/>
           <p:nvPr/>
         </p:nvSpPr>
@@ -1624,7 +1609,7 @@
       </p:sp>
       <p:sp>
         <p:nvSpPr>
-          <p:cNvPr id="25" name="Text 23"/>
+          <p:cNvPr id="25" name="Text 22"/>
           <p:cNvSpPr txBox="1"/>
           <p:nvPr/>
         </p:nvSpPr>
@@ -1663,7 +1648,7 @@
       </p:sp>
       <p:sp>
         <p:nvSpPr>
-          <p:cNvPr id="26" name="Text 24"/>
+          <p:cNvPr id="26" name="Text 23"/>
           <p:cNvSpPr txBox="1"/>
           <p:nvPr/>
         </p:nvSpPr>
@@ -1702,7 +1687,7 @@
       </p:sp>
       <p:sp>
         <p:nvSpPr>
-          <p:cNvPr id="27" name="Text 25"/>
+          <p:cNvPr id="27" name="Text 24"/>
           <p:cNvSpPr txBox="1"/>
           <p:nvPr/>
         </p:nvSpPr>
@@ -1741,7 +1726,7 @@
       </p:sp>
       <p:sp>
         <p:nvSpPr>
-          <p:cNvPr id="28" name="Shape 26"/>
+          <p:cNvPr id="28" name="Shape 25"/>
           <p:cNvSpPr/>
           <p:nvPr/>
         </p:nvSpPr>
@@ -1766,7 +1751,7 @@
       </p:sp>
       <p:sp>
         <p:nvSpPr>
-          <p:cNvPr id="29" name="Shape 27"/>
+          <p:cNvPr id="29" name="Shape 26"/>
           <p:cNvSpPr/>
           <p:nvPr/>
         </p:nvSpPr>
@@ -1791,7 +1776,7 @@
       </p:sp>
       <p:sp>
         <p:nvSpPr>
-          <p:cNvPr id="30" name="Shape 28"/>
+          <p:cNvPr id="30" name="Shape 27"/>
           <p:cNvSpPr/>
           <p:nvPr/>
         </p:nvSpPr>
@@ -1818,7 +1803,7 @@
       </p:sp>
       <p:sp>
         <p:nvSpPr>
-          <p:cNvPr id="31" name="Shape 29"/>
+          <p:cNvPr id="31" name="Shape 28"/>
           <p:cNvSpPr/>
           <p:nvPr/>
         </p:nvSpPr>
@@ -1843,7 +1828,7 @@
       </p:sp>
       <p:sp>
         <p:nvSpPr>
-          <p:cNvPr id="32" name="Shape 30"/>
+          <p:cNvPr id="32" name="Shape 29"/>
           <p:cNvSpPr/>
           <p:nvPr/>
         </p:nvSpPr>
@@ -1870,7 +1855,7 @@
       </p:sp>
       <p:sp>
         <p:nvSpPr>
-          <p:cNvPr id="33" name="Text 31"/>
+          <p:cNvPr id="33" name="Text 30"/>
           <p:cNvSpPr txBox="1"/>
           <p:nvPr/>
         </p:nvSpPr>
@@ -1909,13 +1894,13 @@
       </p:sp>
       <p:sp>
         <p:nvSpPr>
-          <p:cNvPr id="34" name="Text 32"/>
-          <p:cNvSpPr txBox="1"/>
-          <p:nvPr/>
-        </p:nvSpPr>
-        <p:spPr>
-          <a:xfrm>
-            <a:off x="3177540" y="708660"/>
+          <p:cNvPr id="34" name="Text 31"/>
+          <p:cNvSpPr txBox="1"/>
+          <p:nvPr/>
+        </p:nvSpPr>
+        <p:spPr>
+          <a:xfrm>
+            <a:off x="3168396" y="708660"/>
             <a:ext cx="914400" cy="274320"/>
           </a:xfrm>
           <a:prstGeom prst="rect">
@@ -1925,30 +1910,30 @@
           <a:ln/>
         </p:spPr>
         <p:txBody>
-          <a:bodyPr wrap="square" lIns="0" tIns="0" rIns="0" bIns="0" rtlCol="0" anchor="ctr"/>
+          <a:bodyPr wrap="none" lIns="0" tIns="0" rIns="0" bIns="0" rtlCol="0" anchor="ctr"/>
           <a:lstStyle/>
           <a:p>
             <a:pPr indent="0" marL="0">
               <a:buNone/>
             </a:pPr>
             <a:r>
-              <a:rPr lang="en-US" sz="1500" b="1" dirty="0">
-                <a:solidFill>
-                  <a:srgbClr val="222222"/>
-                </a:solidFill>
-                <a:latin typeface="Meiryo" pitchFamily="34" charset="0"/>
-                <a:ea typeface="Meiryo" pitchFamily="34" charset="-122"/>
-                <a:cs typeface="Meiryo" pitchFamily="34" charset="-120"/>
-              </a:rPr>
-              <a:t>なまえ</a:t>
-            </a:r>
-            <a:endParaRPr lang="en-US" sz="1500" dirty="0"/>
-          </a:p>
-        </p:txBody>
-      </p:sp>
-      <p:sp>
-        <p:nvSpPr>
-          <p:cNvPr id="35" name="Text 33"/>
+              <a:rPr lang="en-US" sz="1000" b="1" dirty="0">
+                <a:solidFill>
+                  <a:srgbClr val="222222"/>
+                </a:solidFill>
+                <a:latin typeface="Meiryo" pitchFamily="34" charset="0"/>
+                <a:ea typeface="Meiryo" pitchFamily="34" charset="-122"/>
+                <a:cs typeface="Meiryo" pitchFamily="34" charset="-120"/>
+              </a:rPr>
+              <a:t>あめふりガエル</a:t>
+            </a:r>
+            <a:endParaRPr lang="en-US" sz="1000" dirty="0"/>
+          </a:p>
+        </p:txBody>
+      </p:sp>
+      <p:sp>
+        <p:nvSpPr>
+          <p:cNvPr id="35" name="Text 32"/>
           <p:cNvSpPr txBox="1"/>
           <p:nvPr/>
         </p:nvSpPr>
@@ -1987,7 +1972,7 @@
       </p:sp>
       <p:sp>
         <p:nvSpPr>
-          <p:cNvPr id="36" name="Shape 34"/>
+          <p:cNvPr id="36" name="Shape 33"/>
           <p:cNvSpPr/>
           <p:nvPr/>
         </p:nvSpPr>
@@ -2012,7 +1997,7 @@
       </p:sp>
       <p:sp>
         <p:nvSpPr>
-          <p:cNvPr id="37" name="Shape 35"/>
+          <p:cNvPr id="37" name="Shape 34"/>
           <p:cNvSpPr/>
           <p:nvPr/>
         </p:nvSpPr>
@@ -2035,48 +2020,33 @@
           </a:ln>
         </p:spPr>
       </p:sp>
-      <p:sp>
-        <p:nvSpPr>
-          <p:cNvPr id="38" name="Text 36"/>
-          <p:cNvSpPr txBox="1"/>
-          <p:nvPr/>
-        </p:nvSpPr>
-        <p:spPr>
-          <a:xfrm>
-            <a:off x="2820924" y="1010412"/>
-            <a:ext cx="1920240" cy="1225296"/>
-          </a:xfrm>
-          <a:prstGeom prst="rect">
-            <a:avLst/>
-          </a:prstGeom>
-          <a:noFill/>
-          <a:ln/>
-        </p:spPr>
-        <p:txBody>
-          <a:bodyPr wrap="square" lIns="0" tIns="0" rIns="0" bIns="0" rtlCol="0" anchor="ctr"/>
-          <a:lstStyle/>
-          <a:p>
-            <a:pPr algn="ctr" indent="0" marL="0">
-              <a:buNone/>
-            </a:pPr>
-            <a:r>
-              <a:rPr lang="en-US" sz="1000" dirty="0">
-                <a:solidFill>
-                  <a:srgbClr val="AAAAAA"/>
-                </a:solidFill>
-                <a:latin typeface="Meiryo" pitchFamily="34" charset="0"/>
-                <a:ea typeface="Meiryo" pitchFamily="34" charset="-122"/>
-                <a:cs typeface="Meiryo" pitchFamily="34" charset="-120"/>
-              </a:rPr>
-              <a:t>ここに絵をかく・はる</a:t>
-            </a:r>
-            <a:endParaRPr lang="en-US" sz="1000" dirty="0"/>
-          </a:p>
-        </p:txBody>
-      </p:sp>
-      <p:sp>
-        <p:nvSpPr>
-          <p:cNvPr id="39" name="Shape 37"/>
+      <p:pic>
+        <p:nvPicPr>
+          <p:cNvPr id="38" name="Image 1" descr="c2.jpg">    </p:cNvPr>
+          <p:cNvPicPr>
+            <a:picLocks noChangeAspect="1"/>
+          </p:cNvPicPr>
+          <p:nvPr/>
+        </p:nvPicPr>
+        <p:blipFill>
+          <a:blip r:embed="rId2"/>
+          <a:stretch>
+            <a:fillRect/>
+          </a:stretch>
+        </p:blipFill>
+        <p:spPr>
+          <a:xfrm>
+            <a:off x="2834640" y="1024128"/>
+            <a:ext cx="1892808" cy="1197864"/>
+          </a:xfrm>
+          <a:prstGeom prst="rect">
+            <a:avLst/>
+          </a:prstGeom>
+        </p:spPr>
+      </p:pic>
+      <p:sp>
+        <p:nvSpPr>
+          <p:cNvPr id="39" name="Shape 35"/>
           <p:cNvSpPr/>
           <p:nvPr/>
         </p:nvSpPr>
@@ -2101,7 +2071,7 @@
       </p:sp>
       <p:sp>
         <p:nvSpPr>
-          <p:cNvPr id="40" name="Text 38"/>
+          <p:cNvPr id="40" name="Text 36"/>
           <p:cNvSpPr txBox="1"/>
           <p:nvPr/>
         </p:nvSpPr>
@@ -2132,7 +2102,7 @@
                 <a:ea typeface="Meiryo" pitchFamily="34" charset="-122"/>
                 <a:cs typeface="Meiryo" pitchFamily="34" charset="-120"/>
               </a:rPr>
-              <a:t>ワザ名１</a:t>
+              <a:t>みずでっぽう</a:t>
             </a:r>
             <a:endParaRPr lang="en-US" sz="1200" dirty="0"/>
           </a:p>
@@ -2140,7 +2110,7 @@
       </p:sp>
       <p:sp>
         <p:nvSpPr>
-          <p:cNvPr id="41" name="Text 39"/>
+          <p:cNvPr id="41" name="Text 37"/>
           <p:cNvSpPr txBox="1"/>
           <p:nvPr/>
         </p:nvSpPr>
@@ -2171,7 +2141,7 @@
                 <a:ea typeface="Meiryo" pitchFamily="34" charset="-122"/>
                 <a:cs typeface="Meiryo" pitchFamily="34" charset="-120"/>
               </a:rPr>
-              <a:t>30</a:t>
+              <a:t>20</a:t>
             </a:r>
             <a:endParaRPr lang="en-US" sz="1400" dirty="0"/>
           </a:p>
@@ -2179,7 +2149,7 @@
       </p:sp>
       <p:sp>
         <p:nvSpPr>
-          <p:cNvPr id="42" name="Text 40"/>
+          <p:cNvPr id="42" name="Text 38"/>
           <p:cNvSpPr txBox="1"/>
           <p:nvPr/>
         </p:nvSpPr>
@@ -2210,7 +2180,7 @@
                 <a:ea typeface="Meiryo" pitchFamily="34" charset="-122"/>
                 <a:cs typeface="Meiryo" pitchFamily="34" charset="-120"/>
               </a:rPr>
-              <a:t>せつめいをかく</a:t>
+              <a:t>くちからみずをとばす。</a:t>
             </a:r>
             <a:endParaRPr lang="en-US" sz="850" dirty="0"/>
           </a:p>
@@ -2218,7 +2188,7 @@
       </p:sp>
       <p:sp>
         <p:nvSpPr>
-          <p:cNvPr id="43" name="Shape 41"/>
+          <p:cNvPr id="43" name="Shape 39"/>
           <p:cNvSpPr/>
           <p:nvPr/>
         </p:nvSpPr>
@@ -2243,7 +2213,7 @@
       </p:sp>
       <p:sp>
         <p:nvSpPr>
-          <p:cNvPr id="44" name="Shape 42"/>
+          <p:cNvPr id="44" name="Shape 40"/>
           <p:cNvSpPr/>
           <p:nvPr/>
         </p:nvSpPr>
@@ -2268,7 +2238,7 @@
       </p:sp>
       <p:sp>
         <p:nvSpPr>
-          <p:cNvPr id="45" name="Text 43"/>
+          <p:cNvPr id="45" name="Text 41"/>
           <p:cNvSpPr txBox="1"/>
           <p:nvPr/>
         </p:nvSpPr>
@@ -2299,7 +2269,7 @@
                 <a:ea typeface="Meiryo" pitchFamily="34" charset="-122"/>
                 <a:cs typeface="Meiryo" pitchFamily="34" charset="-120"/>
               </a:rPr>
-              <a:t>ワザ名２</a:t>
+              <a:t>ずぶぬれ</a:t>
             </a:r>
             <a:endParaRPr lang="en-US" sz="1200" dirty="0"/>
           </a:p>
@@ -2307,7 +2277,7 @@
       </p:sp>
       <p:sp>
         <p:nvSpPr>
-          <p:cNvPr id="46" name="Text 44"/>
+          <p:cNvPr id="46" name="Text 42"/>
           <p:cNvSpPr txBox="1"/>
           <p:nvPr/>
         </p:nvSpPr>
@@ -2338,7 +2308,7 @@
                 <a:ea typeface="Meiryo" pitchFamily="34" charset="-122"/>
                 <a:cs typeface="Meiryo" pitchFamily="34" charset="-120"/>
               </a:rPr>
-              <a:t>60</a:t>
+              <a:t>50</a:t>
             </a:r>
             <a:endParaRPr lang="en-US" sz="1400" dirty="0"/>
           </a:p>
@@ -2346,7 +2316,7 @@
       </p:sp>
       <p:sp>
         <p:nvSpPr>
-          <p:cNvPr id="47" name="Text 45"/>
+          <p:cNvPr id="47" name="Text 43"/>
           <p:cNvSpPr txBox="1"/>
           <p:nvPr/>
         </p:nvSpPr>
@@ -2377,7 +2347,7 @@
                 <a:ea typeface="Meiryo" pitchFamily="34" charset="-122"/>
                 <a:cs typeface="Meiryo" pitchFamily="34" charset="-120"/>
               </a:rPr>
-              <a:t>せつめいをかく</a:t>
+              <a:t>あたまのみずでこうげき。</a:t>
             </a:r>
             <a:endParaRPr lang="en-US" sz="850" dirty="0"/>
           </a:p>
@@ -2385,7 +2355,7 @@
       </p:sp>
       <p:sp>
         <p:nvSpPr>
-          <p:cNvPr id="48" name="Shape 46"/>
+          <p:cNvPr id="48" name="Shape 44"/>
           <p:cNvSpPr/>
           <p:nvPr/>
         </p:nvSpPr>
@@ -2410,7 +2380,7 @@
       </p:sp>
       <p:sp>
         <p:nvSpPr>
-          <p:cNvPr id="49" name="Text 47"/>
+          <p:cNvPr id="49" name="Text 45"/>
           <p:cNvSpPr txBox="1"/>
           <p:nvPr/>
         </p:nvSpPr>
@@ -2449,7 +2419,7 @@
       </p:sp>
       <p:sp>
         <p:nvSpPr>
-          <p:cNvPr id="50" name="Shape 48"/>
+          <p:cNvPr id="50" name="Shape 46"/>
           <p:cNvSpPr/>
           <p:nvPr/>
         </p:nvSpPr>
@@ -2474,7 +2444,7 @@
       </p:sp>
       <p:sp>
         <p:nvSpPr>
-          <p:cNvPr id="51" name="Text 49"/>
+          <p:cNvPr id="51" name="Text 47"/>
           <p:cNvSpPr txBox="1"/>
           <p:nvPr/>
         </p:nvSpPr>
@@ -2513,7 +2483,7 @@
       </p:sp>
       <p:sp>
         <p:nvSpPr>
-          <p:cNvPr id="52" name="Text 50"/>
+          <p:cNvPr id="52" name="Text 48"/>
           <p:cNvSpPr txBox="1"/>
           <p:nvPr/>
         </p:nvSpPr>
@@ -2552,7 +2522,7 @@
       </p:sp>
       <p:sp>
         <p:nvSpPr>
-          <p:cNvPr id="53" name="Text 51"/>
+          <p:cNvPr id="53" name="Text 49"/>
           <p:cNvSpPr txBox="1"/>
           <p:nvPr/>
         </p:nvSpPr>
@@ -2591,7 +2561,7 @@
       </p:sp>
       <p:sp>
         <p:nvSpPr>
-          <p:cNvPr id="54" name="Text 52"/>
+          <p:cNvPr id="54" name="Text 50"/>
           <p:cNvSpPr txBox="1"/>
           <p:nvPr/>
         </p:nvSpPr>
@@ -2630,7 +2600,7 @@
       </p:sp>
       <p:sp>
         <p:nvSpPr>
-          <p:cNvPr id="55" name="Shape 53"/>
+          <p:cNvPr id="55" name="Shape 51"/>
           <p:cNvSpPr/>
           <p:nvPr/>
         </p:nvSpPr>
@@ -2655,7 +2625,7 @@
       </p:sp>
       <p:sp>
         <p:nvSpPr>
-          <p:cNvPr id="56" name="Shape 54"/>
+          <p:cNvPr id="56" name="Shape 52"/>
           <p:cNvSpPr/>
           <p:nvPr/>
         </p:nvSpPr>
@@ -2680,7 +2650,7 @@
       </p:sp>
       <p:sp>
         <p:nvSpPr>
-          <p:cNvPr id="57" name="Shape 55"/>
+          <p:cNvPr id="57" name="Shape 53"/>
           <p:cNvSpPr/>
           <p:nvPr/>
         </p:nvSpPr>
@@ -2707,7 +2677,7 @@
       </p:sp>
       <p:sp>
         <p:nvSpPr>
-          <p:cNvPr id="58" name="Shape 56"/>
+          <p:cNvPr id="58" name="Shape 54"/>
           <p:cNvSpPr/>
           <p:nvPr/>
         </p:nvSpPr>
@@ -2732,7 +2702,7 @@
       </p:sp>
       <p:sp>
         <p:nvSpPr>
-          <p:cNvPr id="59" name="Shape 57"/>
+          <p:cNvPr id="59" name="Shape 55"/>
           <p:cNvSpPr/>
           <p:nvPr/>
         </p:nvSpPr>
@@ -2759,7 +2729,7 @@
       </p:sp>
       <p:sp>
         <p:nvSpPr>
-          <p:cNvPr id="60" name="Text 58"/>
+          <p:cNvPr id="60" name="Text 56"/>
           <p:cNvSpPr txBox="1"/>
           <p:nvPr/>
         </p:nvSpPr>
@@ -2798,13 +2768,13 @@
       </p:sp>
       <p:sp>
         <p:nvSpPr>
-          <p:cNvPr id="61" name="Text 59"/>
-          <p:cNvSpPr txBox="1"/>
-          <p:nvPr/>
-        </p:nvSpPr>
-        <p:spPr>
-          <a:xfrm>
-            <a:off x="5445252" y="708660"/>
+          <p:cNvPr id="61" name="Text 57"/>
+          <p:cNvSpPr txBox="1"/>
+          <p:nvPr/>
+        </p:nvSpPr>
+        <p:spPr>
+          <a:xfrm>
+            <a:off x="5436108" y="708660"/>
             <a:ext cx="914400" cy="274320"/>
           </a:xfrm>
           <a:prstGeom prst="rect">
@@ -2814,30 +2784,30 @@
           <a:ln/>
         </p:spPr>
         <p:txBody>
-          <a:bodyPr wrap="square" lIns="0" tIns="0" rIns="0" bIns="0" rtlCol="0" anchor="ctr"/>
+          <a:bodyPr wrap="none" lIns="0" tIns="0" rIns="0" bIns="0" rtlCol="0" anchor="ctr"/>
           <a:lstStyle/>
           <a:p>
             <a:pPr indent="0" marL="0">
               <a:buNone/>
             </a:pPr>
             <a:r>
-              <a:rPr lang="en-US" sz="1500" b="1" dirty="0">
-                <a:solidFill>
-                  <a:srgbClr val="222222"/>
-                </a:solidFill>
-                <a:latin typeface="Meiryo" pitchFamily="34" charset="0"/>
-                <a:ea typeface="Meiryo" pitchFamily="34" charset="-122"/>
-                <a:cs typeface="Meiryo" pitchFamily="34" charset="-120"/>
-              </a:rPr>
-              <a:t>なまえ</a:t>
-            </a:r>
-            <a:endParaRPr lang="en-US" sz="1500" dirty="0"/>
-          </a:p>
-        </p:txBody>
-      </p:sp>
-      <p:sp>
-        <p:nvSpPr>
-          <p:cNvPr id="62" name="Text 60"/>
+              <a:rPr lang="en-US" sz="1100" b="1" dirty="0">
+                <a:solidFill>
+                  <a:srgbClr val="222222"/>
+                </a:solidFill>
+                <a:latin typeface="Meiryo" pitchFamily="34" charset="0"/>
+                <a:ea typeface="Meiryo" pitchFamily="34" charset="-122"/>
+                <a:cs typeface="Meiryo" pitchFamily="34" charset="-120"/>
+              </a:rPr>
+              <a:t>はっぱウサギ</a:t>
+            </a:r>
+            <a:endParaRPr lang="en-US" sz="1100" dirty="0"/>
+          </a:p>
+        </p:txBody>
+      </p:sp>
+      <p:sp>
+        <p:nvSpPr>
+          <p:cNvPr id="62" name="Text 58"/>
           <p:cNvSpPr txBox="1"/>
           <p:nvPr/>
         </p:nvSpPr>
@@ -2868,7 +2838,7 @@
                 <a:ea typeface="Meiryo" pitchFamily="34" charset="-122"/>
                 <a:cs typeface="Meiryo" pitchFamily="34" charset="-120"/>
               </a:rPr>
-              <a:t>HP 70</a:t>
+              <a:t>HP 60</a:t>
             </a:r>
             <a:endParaRPr lang="en-US" sz="1200" dirty="0"/>
           </a:p>
@@ -2876,7 +2846,7 @@
       </p:sp>
       <p:sp>
         <p:nvSpPr>
-          <p:cNvPr id="63" name="Shape 61"/>
+          <p:cNvPr id="63" name="Shape 59"/>
           <p:cNvSpPr/>
           <p:nvPr/>
         </p:nvSpPr>
@@ -2901,7 +2871,7 @@
       </p:sp>
       <p:sp>
         <p:nvSpPr>
-          <p:cNvPr id="64" name="Shape 62"/>
+          <p:cNvPr id="64" name="Shape 60"/>
           <p:cNvSpPr/>
           <p:nvPr/>
         </p:nvSpPr>
@@ -2924,48 +2894,33 @@
           </a:ln>
         </p:spPr>
       </p:sp>
-      <p:sp>
-        <p:nvSpPr>
-          <p:cNvPr id="65" name="Text 63"/>
-          <p:cNvSpPr txBox="1"/>
-          <p:nvPr/>
-        </p:nvSpPr>
-        <p:spPr>
-          <a:xfrm>
-            <a:off x="5088636" y="1010412"/>
-            <a:ext cx="1920240" cy="1225296"/>
-          </a:xfrm>
-          <a:prstGeom prst="rect">
-            <a:avLst/>
-          </a:prstGeom>
-          <a:noFill/>
-          <a:ln/>
-        </p:spPr>
-        <p:txBody>
-          <a:bodyPr wrap="square" lIns="0" tIns="0" rIns="0" bIns="0" rtlCol="0" anchor="ctr"/>
-          <a:lstStyle/>
-          <a:p>
-            <a:pPr algn="ctr" indent="0" marL="0">
-              <a:buNone/>
-            </a:pPr>
-            <a:r>
-              <a:rPr lang="en-US" sz="1000" dirty="0">
-                <a:solidFill>
-                  <a:srgbClr val="AAAAAA"/>
-                </a:solidFill>
-                <a:latin typeface="Meiryo" pitchFamily="34" charset="0"/>
-                <a:ea typeface="Meiryo" pitchFamily="34" charset="-122"/>
-                <a:cs typeface="Meiryo" pitchFamily="34" charset="-120"/>
-              </a:rPr>
-              <a:t>ここに絵をかく・はる</a:t>
-            </a:r>
-            <a:endParaRPr lang="en-US" sz="1000" dirty="0"/>
-          </a:p>
-        </p:txBody>
-      </p:sp>
-      <p:sp>
-        <p:nvSpPr>
-          <p:cNvPr id="66" name="Shape 64"/>
+      <p:pic>
+        <p:nvPicPr>
+          <p:cNvPr id="65" name="Image 2" descr="c3.jpg">    </p:cNvPr>
+          <p:cNvPicPr>
+            <a:picLocks noChangeAspect="1"/>
+          </p:cNvPicPr>
+          <p:nvPr/>
+        </p:nvPicPr>
+        <p:blipFill>
+          <a:blip r:embed="rId3"/>
+          <a:stretch>
+            <a:fillRect/>
+          </a:stretch>
+        </p:blipFill>
+        <p:spPr>
+          <a:xfrm>
+            <a:off x="5102352" y="1024128"/>
+            <a:ext cx="1892808" cy="1197864"/>
+          </a:xfrm>
+          <a:prstGeom prst="rect">
+            <a:avLst/>
+          </a:prstGeom>
+        </p:spPr>
+      </p:pic>
+      <p:sp>
+        <p:nvSpPr>
+          <p:cNvPr id="66" name="Shape 61"/>
           <p:cNvSpPr/>
           <p:nvPr/>
         </p:nvSpPr>
@@ -2990,7 +2945,7 @@
       </p:sp>
       <p:sp>
         <p:nvSpPr>
-          <p:cNvPr id="67" name="Text 65"/>
+          <p:cNvPr id="67" name="Text 62"/>
           <p:cNvSpPr txBox="1"/>
           <p:nvPr/>
         </p:nvSpPr>
@@ -3021,7 +2976,7 @@
                 <a:ea typeface="Meiryo" pitchFamily="34" charset="-122"/>
                 <a:cs typeface="Meiryo" pitchFamily="34" charset="-120"/>
               </a:rPr>
-              <a:t>ワザ名１</a:t>
+              <a:t>はっぱカッター</a:t>
             </a:r>
             <a:endParaRPr lang="en-US" sz="1200" dirty="0"/>
           </a:p>
@@ -3029,7 +2984,7 @@
       </p:sp>
       <p:sp>
         <p:nvSpPr>
-          <p:cNvPr id="68" name="Text 66"/>
+          <p:cNvPr id="68" name="Text 63"/>
           <p:cNvSpPr txBox="1"/>
           <p:nvPr/>
         </p:nvSpPr>
@@ -3060,7 +3015,7 @@
                 <a:ea typeface="Meiryo" pitchFamily="34" charset="-122"/>
                 <a:cs typeface="Meiryo" pitchFamily="34" charset="-120"/>
               </a:rPr>
-              <a:t>30</a:t>
+              <a:t>20</a:t>
             </a:r>
             <a:endParaRPr lang="en-US" sz="1400" dirty="0"/>
           </a:p>
@@ -3068,7 +3023,7 @@
       </p:sp>
       <p:sp>
         <p:nvSpPr>
-          <p:cNvPr id="69" name="Text 67"/>
+          <p:cNvPr id="69" name="Text 64"/>
           <p:cNvSpPr txBox="1"/>
           <p:nvPr/>
         </p:nvSpPr>
@@ -3099,7 +3054,7 @@
                 <a:ea typeface="Meiryo" pitchFamily="34" charset="-122"/>
                 <a:cs typeface="Meiryo" pitchFamily="34" charset="-120"/>
               </a:rPr>
-              <a:t>せつめいをかく</a:t>
+              <a:t>はっぱをとばして こうげき。</a:t>
             </a:r>
             <a:endParaRPr lang="en-US" sz="850" dirty="0"/>
           </a:p>
@@ -3107,7 +3062,7 @@
       </p:sp>
       <p:sp>
         <p:nvSpPr>
-          <p:cNvPr id="70" name="Shape 68"/>
+          <p:cNvPr id="70" name="Shape 65"/>
           <p:cNvSpPr/>
           <p:nvPr/>
         </p:nvSpPr>
@@ -3132,7 +3087,7 @@
       </p:sp>
       <p:sp>
         <p:nvSpPr>
-          <p:cNvPr id="71" name="Shape 69"/>
+          <p:cNvPr id="71" name="Shape 66"/>
           <p:cNvSpPr/>
           <p:nvPr/>
         </p:nvSpPr>
@@ -3157,7 +3112,7 @@
       </p:sp>
       <p:sp>
         <p:nvSpPr>
-          <p:cNvPr id="72" name="Text 70"/>
+          <p:cNvPr id="72" name="Text 67"/>
           <p:cNvSpPr txBox="1"/>
           <p:nvPr/>
         </p:nvSpPr>
@@ -3188,7 +3143,7 @@
                 <a:ea typeface="Meiryo" pitchFamily="34" charset="-122"/>
                 <a:cs typeface="Meiryo" pitchFamily="34" charset="-120"/>
               </a:rPr>
-              <a:t>ワザ名２</a:t>
+              <a:t>ふわタックル</a:t>
             </a:r>
             <a:endParaRPr lang="en-US" sz="1200" dirty="0"/>
           </a:p>
@@ -3196,7 +3151,7 @@
       </p:sp>
       <p:sp>
         <p:nvSpPr>
-          <p:cNvPr id="73" name="Text 71"/>
+          <p:cNvPr id="73" name="Text 68"/>
           <p:cNvSpPr txBox="1"/>
           <p:nvPr/>
         </p:nvSpPr>
@@ -3227,7 +3182,7 @@
                 <a:ea typeface="Meiryo" pitchFamily="34" charset="-122"/>
                 <a:cs typeface="Meiryo" pitchFamily="34" charset="-120"/>
               </a:rPr>
-              <a:t>60</a:t>
+              <a:t>50</a:t>
             </a:r>
             <a:endParaRPr lang="en-US" sz="1400" dirty="0"/>
           </a:p>
@@ -3235,7 +3190,7 @@
       </p:sp>
       <p:sp>
         <p:nvSpPr>
-          <p:cNvPr id="74" name="Text 72"/>
+          <p:cNvPr id="74" name="Text 69"/>
           <p:cNvSpPr txBox="1"/>
           <p:nvPr/>
         </p:nvSpPr>
@@ -3266,7 +3221,7 @@
                 <a:ea typeface="Meiryo" pitchFamily="34" charset="-122"/>
                 <a:cs typeface="Meiryo" pitchFamily="34" charset="-120"/>
               </a:rPr>
-              <a:t>せつめいをかく</a:t>
+              <a:t>やわらかいからだでぶつかる。</a:t>
             </a:r>
             <a:endParaRPr lang="en-US" sz="850" dirty="0"/>
           </a:p>
@@ -3274,7 +3229,7 @@
       </p:sp>
       <p:sp>
         <p:nvSpPr>
-          <p:cNvPr id="75" name="Shape 73"/>
+          <p:cNvPr id="75" name="Shape 70"/>
           <p:cNvSpPr/>
           <p:nvPr/>
         </p:nvSpPr>
@@ -3299,7 +3254,7 @@
       </p:sp>
       <p:sp>
         <p:nvSpPr>
-          <p:cNvPr id="76" name="Text 74"/>
+          <p:cNvPr id="76" name="Text 71"/>
           <p:cNvSpPr txBox="1"/>
           <p:nvPr/>
         </p:nvSpPr>
@@ -3338,7 +3293,7 @@
       </p:sp>
       <p:sp>
         <p:nvSpPr>
-          <p:cNvPr id="77" name="Shape 75"/>
+          <p:cNvPr id="77" name="Shape 72"/>
           <p:cNvSpPr/>
           <p:nvPr/>
         </p:nvSpPr>
@@ -3363,7 +3318,7 @@
       </p:sp>
       <p:sp>
         <p:nvSpPr>
-          <p:cNvPr id="78" name="Text 76"/>
+          <p:cNvPr id="78" name="Text 73"/>
           <p:cNvSpPr txBox="1"/>
           <p:nvPr/>
         </p:nvSpPr>
@@ -3402,7 +3357,7 @@
       </p:sp>
       <p:sp>
         <p:nvSpPr>
-          <p:cNvPr id="79" name="Text 77"/>
+          <p:cNvPr id="79" name="Text 74"/>
           <p:cNvSpPr txBox="1"/>
           <p:nvPr/>
         </p:nvSpPr>
@@ -3441,7 +3396,7 @@
       </p:sp>
       <p:sp>
         <p:nvSpPr>
-          <p:cNvPr id="80" name="Text 78"/>
+          <p:cNvPr id="80" name="Text 75"/>
           <p:cNvSpPr txBox="1"/>
           <p:nvPr/>
         </p:nvSpPr>
@@ -3480,7 +3435,7 @@
       </p:sp>
       <p:sp>
         <p:nvSpPr>
-          <p:cNvPr id="81" name="Text 79"/>
+          <p:cNvPr id="81" name="Text 76"/>
           <p:cNvSpPr txBox="1"/>
           <p:nvPr/>
         </p:nvSpPr>
@@ -3519,7 +3474,7 @@
       </p:sp>
       <p:sp>
         <p:nvSpPr>
-          <p:cNvPr id="82" name="Shape 80"/>
+          <p:cNvPr id="82" name="Shape 77"/>
           <p:cNvSpPr/>
           <p:nvPr/>
         </p:nvSpPr>
@@ -3544,7 +3499,7 @@
       </p:sp>
       <p:sp>
         <p:nvSpPr>
-          <p:cNvPr id="83" name="Shape 81"/>
+          <p:cNvPr id="83" name="Shape 78"/>
           <p:cNvSpPr/>
           <p:nvPr/>
         </p:nvSpPr>
@@ -3569,7 +3524,7 @@
       </p:sp>
       <p:sp>
         <p:nvSpPr>
-          <p:cNvPr id="84" name="Shape 82"/>
+          <p:cNvPr id="84" name="Shape 79"/>
           <p:cNvSpPr/>
           <p:nvPr/>
         </p:nvSpPr>
@@ -3596,7 +3551,7 @@
       </p:sp>
       <p:sp>
         <p:nvSpPr>
-          <p:cNvPr id="85" name="Shape 83"/>
+          <p:cNvPr id="85" name="Shape 80"/>
           <p:cNvSpPr/>
           <p:nvPr/>
         </p:nvSpPr>
@@ -3621,7 +3576,7 @@
       </p:sp>
       <p:sp>
         <p:nvSpPr>
-          <p:cNvPr id="86" name="Shape 84"/>
+          <p:cNvPr id="86" name="Shape 81"/>
           <p:cNvSpPr/>
           <p:nvPr/>
         </p:nvSpPr>
@@ -3648,7 +3603,7 @@
       </p:sp>
       <p:sp>
         <p:nvSpPr>
-          <p:cNvPr id="87" name="Text 85"/>
+          <p:cNvPr id="87" name="Text 82"/>
           <p:cNvSpPr txBox="1"/>
           <p:nvPr/>
         </p:nvSpPr>
@@ -3687,13 +3642,13 @@
       </p:sp>
       <p:sp>
         <p:nvSpPr>
-          <p:cNvPr id="88" name="Text 86"/>
-          <p:cNvSpPr txBox="1"/>
-          <p:nvPr/>
-        </p:nvSpPr>
-        <p:spPr>
-          <a:xfrm>
-            <a:off x="909828" y="3872484"/>
+          <p:cNvPr id="88" name="Text 83"/>
+          <p:cNvSpPr txBox="1"/>
+          <p:nvPr/>
+        </p:nvSpPr>
+        <p:spPr>
+          <a:xfrm>
+            <a:off x="900684" y="3872484"/>
             <a:ext cx="914400" cy="274320"/>
           </a:xfrm>
           <a:prstGeom prst="rect">
@@ -3703,7 +3658,7 @@
           <a:ln/>
         </p:spPr>
         <p:txBody>
-          <a:bodyPr wrap="square" lIns="0" tIns="0" rIns="0" bIns="0" rtlCol="0" anchor="ctr"/>
+          <a:bodyPr wrap="none" lIns="0" tIns="0" rIns="0" bIns="0" rtlCol="0" anchor="ctr"/>
           <a:lstStyle/>
           <a:p>
             <a:pPr indent="0" marL="0">
@@ -3726,7 +3681,7 @@
       </p:sp>
       <p:sp>
         <p:nvSpPr>
-          <p:cNvPr id="89" name="Text 87"/>
+          <p:cNvPr id="89" name="Text 84"/>
           <p:cNvSpPr txBox="1"/>
           <p:nvPr/>
         </p:nvSpPr>
@@ -3765,7 +3720,7 @@
       </p:sp>
       <p:sp>
         <p:nvSpPr>
-          <p:cNvPr id="90" name="Shape 88"/>
+          <p:cNvPr id="90" name="Shape 85"/>
           <p:cNvSpPr/>
           <p:nvPr/>
         </p:nvSpPr>
@@ -3790,7 +3745,7 @@
       </p:sp>
       <p:sp>
         <p:nvSpPr>
-          <p:cNvPr id="91" name="Shape 89"/>
+          <p:cNvPr id="91" name="Shape 86"/>
           <p:cNvSpPr/>
           <p:nvPr/>
         </p:nvSpPr>
@@ -3815,7 +3770,7 @@
       </p:sp>
       <p:sp>
         <p:nvSpPr>
-          <p:cNvPr id="92" name="Text 90"/>
+          <p:cNvPr id="92" name="Text 87"/>
           <p:cNvSpPr txBox="1"/>
           <p:nvPr/>
         </p:nvSpPr>
@@ -3854,7 +3809,7 @@
       </p:sp>
       <p:sp>
         <p:nvSpPr>
-          <p:cNvPr id="93" name="Shape 91"/>
+          <p:cNvPr id="93" name="Shape 88"/>
           <p:cNvSpPr/>
           <p:nvPr/>
         </p:nvSpPr>
@@ -3879,7 +3834,7 @@
       </p:sp>
       <p:sp>
         <p:nvSpPr>
-          <p:cNvPr id="94" name="Text 92"/>
+          <p:cNvPr id="94" name="Text 89"/>
           <p:cNvSpPr txBox="1"/>
           <p:nvPr/>
         </p:nvSpPr>
@@ -3918,7 +3873,7 @@
       </p:sp>
       <p:sp>
         <p:nvSpPr>
-          <p:cNvPr id="95" name="Text 93"/>
+          <p:cNvPr id="95" name="Text 90"/>
           <p:cNvSpPr txBox="1"/>
           <p:nvPr/>
         </p:nvSpPr>
@@ -3957,7 +3912,7 @@
       </p:sp>
       <p:sp>
         <p:nvSpPr>
-          <p:cNvPr id="96" name="Text 94"/>
+          <p:cNvPr id="96" name="Text 91"/>
           <p:cNvSpPr txBox="1"/>
           <p:nvPr/>
         </p:nvSpPr>
@@ -3996,7 +3951,7 @@
       </p:sp>
       <p:sp>
         <p:nvSpPr>
-          <p:cNvPr id="97" name="Shape 95"/>
+          <p:cNvPr id="97" name="Shape 92"/>
           <p:cNvSpPr/>
           <p:nvPr/>
         </p:nvSpPr>
@@ -4021,7 +3976,7 @@
       </p:sp>
       <p:sp>
         <p:nvSpPr>
-          <p:cNvPr id="98" name="Shape 96"/>
+          <p:cNvPr id="98" name="Shape 93"/>
           <p:cNvSpPr/>
           <p:nvPr/>
         </p:nvSpPr>
@@ -4046,7 +4001,7 @@
       </p:sp>
       <p:sp>
         <p:nvSpPr>
-          <p:cNvPr id="99" name="Text 97"/>
+          <p:cNvPr id="99" name="Text 94"/>
           <p:cNvSpPr txBox="1"/>
           <p:nvPr/>
         </p:nvSpPr>
@@ -4085,7 +4040,7 @@
       </p:sp>
       <p:sp>
         <p:nvSpPr>
-          <p:cNvPr id="100" name="Text 98"/>
+          <p:cNvPr id="100" name="Text 95"/>
           <p:cNvSpPr txBox="1"/>
           <p:nvPr/>
         </p:nvSpPr>
@@ -4124,7 +4079,7 @@
       </p:sp>
       <p:sp>
         <p:nvSpPr>
-          <p:cNvPr id="101" name="Text 99"/>
+          <p:cNvPr id="101" name="Text 96"/>
           <p:cNvSpPr txBox="1"/>
           <p:nvPr/>
         </p:nvSpPr>
@@ -4163,7 +4118,7 @@
       </p:sp>
       <p:sp>
         <p:nvSpPr>
-          <p:cNvPr id="102" name="Shape 100"/>
+          <p:cNvPr id="102" name="Shape 97"/>
           <p:cNvSpPr/>
           <p:nvPr/>
         </p:nvSpPr>
@@ -4188,7 +4143,7 @@
       </p:sp>
       <p:sp>
         <p:nvSpPr>
-          <p:cNvPr id="103" name="Text 101"/>
+          <p:cNvPr id="103" name="Text 98"/>
           <p:cNvSpPr txBox="1"/>
           <p:nvPr/>
         </p:nvSpPr>
@@ -4227,7 +4182,7 @@
       </p:sp>
       <p:sp>
         <p:nvSpPr>
-          <p:cNvPr id="104" name="Shape 102"/>
+          <p:cNvPr id="104" name="Shape 99"/>
           <p:cNvSpPr/>
           <p:nvPr/>
         </p:nvSpPr>
@@ -4252,7 +4207,7 @@
       </p:sp>
       <p:sp>
         <p:nvSpPr>
-          <p:cNvPr id="105" name="Text 103"/>
+          <p:cNvPr id="105" name="Text 100"/>
           <p:cNvSpPr txBox="1"/>
           <p:nvPr/>
         </p:nvSpPr>
@@ -4291,7 +4246,7 @@
       </p:sp>
       <p:sp>
         <p:nvSpPr>
-          <p:cNvPr id="106" name="Text 104"/>
+          <p:cNvPr id="106" name="Text 101"/>
           <p:cNvSpPr txBox="1"/>
           <p:nvPr/>
         </p:nvSpPr>
@@ -4330,7 +4285,7 @@
       </p:sp>
       <p:sp>
         <p:nvSpPr>
-          <p:cNvPr id="107" name="Text 105"/>
+          <p:cNvPr id="107" name="Text 102"/>
           <p:cNvSpPr txBox="1"/>
           <p:nvPr/>
         </p:nvSpPr>
@@ -4369,7 +4324,7 @@
       </p:sp>
       <p:sp>
         <p:nvSpPr>
-          <p:cNvPr id="108" name="Text 106"/>
+          <p:cNvPr id="108" name="Text 103"/>
           <p:cNvSpPr txBox="1"/>
           <p:nvPr/>
         </p:nvSpPr>
@@ -4408,7 +4363,7 @@
       </p:sp>
       <p:sp>
         <p:nvSpPr>
-          <p:cNvPr id="109" name="Shape 107"/>
+          <p:cNvPr id="109" name="Shape 104"/>
           <p:cNvSpPr/>
           <p:nvPr/>
         </p:nvSpPr>
@@ -4433,7 +4388,7 @@
       </p:sp>
       <p:sp>
         <p:nvSpPr>
-          <p:cNvPr id="110" name="Shape 108"/>
+          <p:cNvPr id="110" name="Shape 105"/>
           <p:cNvSpPr/>
           <p:nvPr/>
         </p:nvSpPr>
@@ -4458,7 +4413,7 @@
       </p:sp>
       <p:sp>
         <p:nvSpPr>
-          <p:cNvPr id="111" name="Shape 109"/>
+          <p:cNvPr id="111" name="Shape 106"/>
           <p:cNvSpPr/>
           <p:nvPr/>
         </p:nvSpPr>
@@ -4485,7 +4440,7 @@
       </p:sp>
       <p:sp>
         <p:nvSpPr>
-          <p:cNvPr id="112" name="Shape 110"/>
+          <p:cNvPr id="112" name="Shape 107"/>
           <p:cNvSpPr/>
           <p:nvPr/>
         </p:nvSpPr>
@@ -4510,7 +4465,7 @@
       </p:sp>
       <p:sp>
         <p:nvSpPr>
-          <p:cNvPr id="113" name="Shape 111"/>
+          <p:cNvPr id="113" name="Shape 108"/>
           <p:cNvSpPr/>
           <p:nvPr/>
         </p:nvSpPr>
@@ -4537,7 +4492,7 @@
       </p:sp>
       <p:sp>
         <p:nvSpPr>
-          <p:cNvPr id="114" name="Text 112"/>
+          <p:cNvPr id="114" name="Text 109"/>
           <p:cNvSpPr txBox="1"/>
           <p:nvPr/>
         </p:nvSpPr>
@@ -4576,13 +4531,13 @@
       </p:sp>
       <p:sp>
         <p:nvSpPr>
-          <p:cNvPr id="115" name="Text 113"/>
-          <p:cNvSpPr txBox="1"/>
-          <p:nvPr/>
-        </p:nvSpPr>
-        <p:spPr>
-          <a:xfrm>
-            <a:off x="3177540" y="3872484"/>
+          <p:cNvPr id="115" name="Text 110"/>
+          <p:cNvSpPr txBox="1"/>
+          <p:nvPr/>
+        </p:nvSpPr>
+        <p:spPr>
+          <a:xfrm>
+            <a:off x="3168396" y="3872484"/>
             <a:ext cx="914400" cy="274320"/>
           </a:xfrm>
           <a:prstGeom prst="rect">
@@ -4592,7 +4547,7 @@
           <a:ln/>
         </p:spPr>
         <p:txBody>
-          <a:bodyPr wrap="square" lIns="0" tIns="0" rIns="0" bIns="0" rtlCol="0" anchor="ctr"/>
+          <a:bodyPr wrap="none" lIns="0" tIns="0" rIns="0" bIns="0" rtlCol="0" anchor="ctr"/>
           <a:lstStyle/>
           <a:p>
             <a:pPr indent="0" marL="0">
@@ -4615,7 +4570,7 @@
       </p:sp>
       <p:sp>
         <p:nvSpPr>
-          <p:cNvPr id="116" name="Text 114"/>
+          <p:cNvPr id="116" name="Text 111"/>
           <p:cNvSpPr txBox="1"/>
           <p:nvPr/>
         </p:nvSpPr>
@@ -4654,7 +4609,7 @@
       </p:sp>
       <p:sp>
         <p:nvSpPr>
-          <p:cNvPr id="117" name="Shape 115"/>
+          <p:cNvPr id="117" name="Shape 112"/>
           <p:cNvSpPr/>
           <p:nvPr/>
         </p:nvSpPr>
@@ -4679,7 +4634,7 @@
       </p:sp>
       <p:sp>
         <p:nvSpPr>
-          <p:cNvPr id="118" name="Shape 116"/>
+          <p:cNvPr id="118" name="Shape 113"/>
           <p:cNvSpPr/>
           <p:nvPr/>
         </p:nvSpPr>
@@ -4704,7 +4659,7 @@
       </p:sp>
       <p:sp>
         <p:nvSpPr>
-          <p:cNvPr id="119" name="Text 117"/>
+          <p:cNvPr id="119" name="Text 114"/>
           <p:cNvSpPr txBox="1"/>
           <p:nvPr/>
         </p:nvSpPr>
@@ -4743,7 +4698,7 @@
       </p:sp>
       <p:sp>
         <p:nvSpPr>
-          <p:cNvPr id="120" name="Shape 118"/>
+          <p:cNvPr id="120" name="Shape 115"/>
           <p:cNvSpPr/>
           <p:nvPr/>
         </p:nvSpPr>
@@ -4768,7 +4723,7 @@
       </p:sp>
       <p:sp>
         <p:nvSpPr>
-          <p:cNvPr id="121" name="Text 119"/>
+          <p:cNvPr id="121" name="Text 116"/>
           <p:cNvSpPr txBox="1"/>
           <p:nvPr/>
         </p:nvSpPr>
@@ -4807,7 +4762,7 @@
       </p:sp>
       <p:sp>
         <p:nvSpPr>
-          <p:cNvPr id="122" name="Text 120"/>
+          <p:cNvPr id="122" name="Text 117"/>
           <p:cNvSpPr txBox="1"/>
           <p:nvPr/>
         </p:nvSpPr>
@@ -4846,7 +4801,7 @@
       </p:sp>
       <p:sp>
         <p:nvSpPr>
-          <p:cNvPr id="123" name="Text 121"/>
+          <p:cNvPr id="123" name="Text 118"/>
           <p:cNvSpPr txBox="1"/>
           <p:nvPr/>
         </p:nvSpPr>
@@ -4885,7 +4840,7 @@
       </p:sp>
       <p:sp>
         <p:nvSpPr>
-          <p:cNvPr id="124" name="Shape 122"/>
+          <p:cNvPr id="124" name="Shape 119"/>
           <p:cNvSpPr/>
           <p:nvPr/>
         </p:nvSpPr>
@@ -4910,7 +4865,7 @@
       </p:sp>
       <p:sp>
         <p:nvSpPr>
-          <p:cNvPr id="125" name="Shape 123"/>
+          <p:cNvPr id="125" name="Shape 120"/>
           <p:cNvSpPr/>
           <p:nvPr/>
         </p:nvSpPr>
@@ -4935,7 +4890,7 @@
       </p:sp>
       <p:sp>
         <p:nvSpPr>
-          <p:cNvPr id="126" name="Text 124"/>
+          <p:cNvPr id="126" name="Text 121"/>
           <p:cNvSpPr txBox="1"/>
           <p:nvPr/>
         </p:nvSpPr>
@@ -4974,7 +4929,7 @@
       </p:sp>
       <p:sp>
         <p:nvSpPr>
-          <p:cNvPr id="127" name="Text 125"/>
+          <p:cNvPr id="127" name="Text 122"/>
           <p:cNvSpPr txBox="1"/>
           <p:nvPr/>
         </p:nvSpPr>
@@ -5013,7 +4968,7 @@
       </p:sp>
       <p:sp>
         <p:nvSpPr>
-          <p:cNvPr id="128" name="Text 126"/>
+          <p:cNvPr id="128" name="Text 123"/>
           <p:cNvSpPr txBox="1"/>
           <p:nvPr/>
         </p:nvSpPr>
@@ -5052,7 +5007,7 @@
       </p:sp>
       <p:sp>
         <p:nvSpPr>
-          <p:cNvPr id="129" name="Shape 127"/>
+          <p:cNvPr id="129" name="Shape 124"/>
           <p:cNvSpPr/>
           <p:nvPr/>
         </p:nvSpPr>
@@ -5077,7 +5032,7 @@
       </p:sp>
       <p:sp>
         <p:nvSpPr>
-          <p:cNvPr id="130" name="Text 128"/>
+          <p:cNvPr id="130" name="Text 125"/>
           <p:cNvSpPr txBox="1"/>
           <p:nvPr/>
         </p:nvSpPr>
@@ -5116,7 +5071,7 @@
       </p:sp>
       <p:sp>
         <p:nvSpPr>
-          <p:cNvPr id="131" name="Shape 129"/>
+          <p:cNvPr id="131" name="Shape 126"/>
           <p:cNvSpPr/>
           <p:nvPr/>
         </p:nvSpPr>
@@ -5141,7 +5096,7 @@
       </p:sp>
       <p:sp>
         <p:nvSpPr>
-          <p:cNvPr id="132" name="Text 130"/>
+          <p:cNvPr id="132" name="Text 127"/>
           <p:cNvSpPr txBox="1"/>
           <p:nvPr/>
         </p:nvSpPr>
@@ -5180,7 +5135,7 @@
       </p:sp>
       <p:sp>
         <p:nvSpPr>
-          <p:cNvPr id="133" name="Text 131"/>
+          <p:cNvPr id="133" name="Text 128"/>
           <p:cNvSpPr txBox="1"/>
           <p:nvPr/>
         </p:nvSpPr>
@@ -5219,7 +5174,7 @@
       </p:sp>
       <p:sp>
         <p:nvSpPr>
-          <p:cNvPr id="134" name="Text 132"/>
+          <p:cNvPr id="134" name="Text 129"/>
           <p:cNvSpPr txBox="1"/>
           <p:nvPr/>
         </p:nvSpPr>
@@ -5258,7 +5213,7 @@
       </p:sp>
       <p:sp>
         <p:nvSpPr>
-          <p:cNvPr id="135" name="Text 133"/>
+          <p:cNvPr id="135" name="Text 130"/>
           <p:cNvSpPr txBox="1"/>
           <p:nvPr/>
         </p:nvSpPr>
@@ -5297,7 +5252,7 @@
       </p:sp>
       <p:sp>
         <p:nvSpPr>
-          <p:cNvPr id="136" name="Shape 134"/>
+          <p:cNvPr id="136" name="Shape 131"/>
           <p:cNvSpPr/>
           <p:nvPr/>
         </p:nvSpPr>
@@ -5322,7 +5277,7 @@
       </p:sp>
       <p:sp>
         <p:nvSpPr>
-          <p:cNvPr id="137" name="Shape 135"/>
+          <p:cNvPr id="137" name="Shape 132"/>
           <p:cNvSpPr/>
           <p:nvPr/>
         </p:nvSpPr>
@@ -5347,7 +5302,7 @@
       </p:sp>
       <p:sp>
         <p:nvSpPr>
-          <p:cNvPr id="138" name="Shape 136"/>
+          <p:cNvPr id="138" name="Shape 133"/>
           <p:cNvSpPr/>
           <p:nvPr/>
         </p:nvSpPr>
@@ -5374,7 +5329,7 @@
       </p:sp>
       <p:sp>
         <p:nvSpPr>
-          <p:cNvPr id="139" name="Shape 137"/>
+          <p:cNvPr id="139" name="Shape 134"/>
           <p:cNvSpPr/>
           <p:nvPr/>
         </p:nvSpPr>
@@ -5399,7 +5354,7 @@
       </p:sp>
       <p:sp>
         <p:nvSpPr>
-          <p:cNvPr id="140" name="Shape 138"/>
+          <p:cNvPr id="140" name="Shape 135"/>
           <p:cNvSpPr/>
           <p:nvPr/>
         </p:nvSpPr>
@@ -5426,7 +5381,7 @@
       </p:sp>
       <p:sp>
         <p:nvSpPr>
-          <p:cNvPr id="141" name="Text 139"/>
+          <p:cNvPr id="141" name="Text 136"/>
           <p:cNvSpPr txBox="1"/>
           <p:nvPr/>
         </p:nvSpPr>
@@ -5465,13 +5420,13 @@
       </p:sp>
       <p:sp>
         <p:nvSpPr>
-          <p:cNvPr id="142" name="Text 140"/>
-          <p:cNvSpPr txBox="1"/>
-          <p:nvPr/>
-        </p:nvSpPr>
-        <p:spPr>
-          <a:xfrm>
-            <a:off x="5445252" y="3872484"/>
+          <p:cNvPr id="142" name="Text 137"/>
+          <p:cNvSpPr txBox="1"/>
+          <p:nvPr/>
+        </p:nvSpPr>
+        <p:spPr>
+          <a:xfrm>
+            <a:off x="5436108" y="3872484"/>
             <a:ext cx="914400" cy="274320"/>
           </a:xfrm>
           <a:prstGeom prst="rect">
@@ -5481,7 +5436,7 @@
           <a:ln/>
         </p:spPr>
         <p:txBody>
-          <a:bodyPr wrap="square" lIns="0" tIns="0" rIns="0" bIns="0" rtlCol="0" anchor="ctr"/>
+          <a:bodyPr wrap="none" lIns="0" tIns="0" rIns="0" bIns="0" rtlCol="0" anchor="ctr"/>
           <a:lstStyle/>
           <a:p>
             <a:pPr indent="0" marL="0">
@@ -5504,7 +5459,7 @@
       </p:sp>
       <p:sp>
         <p:nvSpPr>
-          <p:cNvPr id="143" name="Text 141"/>
+          <p:cNvPr id="143" name="Text 138"/>
           <p:cNvSpPr txBox="1"/>
           <p:nvPr/>
         </p:nvSpPr>
@@ -5543,7 +5498,7 @@
       </p:sp>
       <p:sp>
         <p:nvSpPr>
-          <p:cNvPr id="144" name="Shape 142"/>
+          <p:cNvPr id="144" name="Shape 139"/>
           <p:cNvSpPr/>
           <p:nvPr/>
         </p:nvSpPr>
@@ -5568,7 +5523,7 @@
       </p:sp>
       <p:sp>
         <p:nvSpPr>
-          <p:cNvPr id="145" name="Shape 143"/>
+          <p:cNvPr id="145" name="Shape 140"/>
           <p:cNvSpPr/>
           <p:nvPr/>
         </p:nvSpPr>
@@ -5593,7 +5548,7 @@
       </p:sp>
       <p:sp>
         <p:nvSpPr>
-          <p:cNvPr id="146" name="Text 144"/>
+          <p:cNvPr id="146" name="Text 141"/>
           <p:cNvSpPr txBox="1"/>
           <p:nvPr/>
         </p:nvSpPr>
@@ -5632,7 +5587,7 @@
       </p:sp>
       <p:sp>
         <p:nvSpPr>
-          <p:cNvPr id="147" name="Shape 145"/>
+          <p:cNvPr id="147" name="Shape 142"/>
           <p:cNvSpPr/>
           <p:nvPr/>
         </p:nvSpPr>
@@ -5657,7 +5612,7 @@
       </p:sp>
       <p:sp>
         <p:nvSpPr>
-          <p:cNvPr id="148" name="Text 146"/>
+          <p:cNvPr id="148" name="Text 143"/>
           <p:cNvSpPr txBox="1"/>
           <p:nvPr/>
         </p:nvSpPr>
@@ -5696,7 +5651,7 @@
       </p:sp>
       <p:sp>
         <p:nvSpPr>
-          <p:cNvPr id="149" name="Text 147"/>
+          <p:cNvPr id="149" name="Text 144"/>
           <p:cNvSpPr txBox="1"/>
           <p:nvPr/>
         </p:nvSpPr>
@@ -5735,7 +5690,7 @@
       </p:sp>
       <p:sp>
         <p:nvSpPr>
-          <p:cNvPr id="150" name="Text 148"/>
+          <p:cNvPr id="150" name="Text 145"/>
           <p:cNvSpPr txBox="1"/>
           <p:nvPr/>
         </p:nvSpPr>
@@ -5774,7 +5729,7 @@
       </p:sp>
       <p:sp>
         <p:nvSpPr>
-          <p:cNvPr id="151" name="Shape 149"/>
+          <p:cNvPr id="151" name="Shape 146"/>
           <p:cNvSpPr/>
           <p:nvPr/>
         </p:nvSpPr>
@@ -5799,7 +5754,7 @@
       </p:sp>
       <p:sp>
         <p:nvSpPr>
-          <p:cNvPr id="152" name="Shape 150"/>
+          <p:cNvPr id="152" name="Shape 147"/>
           <p:cNvSpPr/>
           <p:nvPr/>
         </p:nvSpPr>
@@ -5824,7 +5779,7 @@
       </p:sp>
       <p:sp>
         <p:nvSpPr>
-          <p:cNvPr id="153" name="Text 151"/>
+          <p:cNvPr id="153" name="Text 148"/>
           <p:cNvSpPr txBox="1"/>
           <p:nvPr/>
         </p:nvSpPr>
@@ -5863,7 +5818,7 @@
       </p:sp>
       <p:sp>
         <p:nvSpPr>
-          <p:cNvPr id="154" name="Text 152"/>
+          <p:cNvPr id="154" name="Text 149"/>
           <p:cNvSpPr txBox="1"/>
           <p:nvPr/>
         </p:nvSpPr>
@@ -5902,7 +5857,7 @@
       </p:sp>
       <p:sp>
         <p:nvSpPr>
-          <p:cNvPr id="155" name="Text 153"/>
+          <p:cNvPr id="155" name="Text 150"/>
           <p:cNvSpPr txBox="1"/>
           <p:nvPr/>
         </p:nvSpPr>
@@ -5941,7 +5896,7 @@
       </p:sp>
       <p:sp>
         <p:nvSpPr>
-          <p:cNvPr id="156" name="Shape 154"/>
+          <p:cNvPr id="156" name="Shape 151"/>
           <p:cNvSpPr/>
           <p:nvPr/>
         </p:nvSpPr>
@@ -5966,7 +5921,7 @@
       </p:sp>
       <p:sp>
         <p:nvSpPr>
-          <p:cNvPr id="157" name="Text 155"/>
+          <p:cNvPr id="157" name="Text 152"/>
           <p:cNvSpPr txBox="1"/>
           <p:nvPr/>
         </p:nvSpPr>
@@ -6005,7 +5960,7 @@
       </p:sp>
       <p:sp>
         <p:nvSpPr>
-          <p:cNvPr id="158" name="Shape 156"/>
+          <p:cNvPr id="158" name="Shape 153"/>
           <p:cNvSpPr/>
           <p:nvPr/>
         </p:nvSpPr>
@@ -6030,7 +5985,7 @@
       </p:sp>
       <p:sp>
         <p:nvSpPr>
-          <p:cNvPr id="159" name="Text 157"/>
+          <p:cNvPr id="159" name="Text 154"/>
           <p:cNvSpPr txBox="1"/>
           <p:nvPr/>
         </p:nvSpPr>
@@ -6069,7 +6024,7 @@
       </p:sp>
       <p:sp>
         <p:nvSpPr>
-          <p:cNvPr id="160" name="Text 158"/>
+          <p:cNvPr id="160" name="Text 155"/>
           <p:cNvSpPr txBox="1"/>
           <p:nvPr/>
         </p:nvSpPr>
@@ -6108,7 +6063,7 @@
       </p:sp>
       <p:sp>
         <p:nvSpPr>
-          <p:cNvPr id="161" name="Text 159"/>
+          <p:cNvPr id="161" name="Text 156"/>
           <p:cNvSpPr txBox="1"/>
           <p:nvPr/>
         </p:nvSpPr>
@@ -6147,7 +6102,7 @@
       </p:sp>
       <p:sp>
         <p:nvSpPr>
-          <p:cNvPr id="162" name="Text 160"/>
+          <p:cNvPr id="162" name="Text 157"/>
           <p:cNvSpPr txBox="1"/>
           <p:nvPr/>
         </p:nvSpPr>
@@ -6186,7 +6141,7 @@
       </p:sp>
       <p:sp>
         <p:nvSpPr>
-          <p:cNvPr id="163" name="Shape 161"/>
+          <p:cNvPr id="163" name="Shape 158"/>
           <p:cNvSpPr/>
           <p:nvPr/>
         </p:nvSpPr>
@@ -6211,7 +6166,7 @@
       </p:sp>
       <p:sp>
         <p:nvSpPr>
-          <p:cNvPr id="164" name="Shape 162"/>
+          <p:cNvPr id="164" name="Shape 159"/>
           <p:cNvSpPr/>
           <p:nvPr/>
         </p:nvSpPr>
@@ -6236,7 +6191,7 @@
       </p:sp>
       <p:sp>
         <p:nvSpPr>
-          <p:cNvPr id="165" name="Shape 163"/>
+          <p:cNvPr id="165" name="Shape 160"/>
           <p:cNvSpPr/>
           <p:nvPr/>
         </p:nvSpPr>
@@ -6263,7 +6218,7 @@
       </p:sp>
       <p:sp>
         <p:nvSpPr>
-          <p:cNvPr id="166" name="Shape 164"/>
+          <p:cNvPr id="166" name="Shape 161"/>
           <p:cNvSpPr/>
           <p:nvPr/>
         </p:nvSpPr>
@@ -6288,7 +6243,7 @@
       </p:sp>
       <p:sp>
         <p:nvSpPr>
-          <p:cNvPr id="167" name="Shape 165"/>
+          <p:cNvPr id="167" name="Shape 162"/>
           <p:cNvSpPr/>
           <p:nvPr/>
         </p:nvSpPr>
@@ -6315,7 +6270,7 @@
       </p:sp>
       <p:sp>
         <p:nvSpPr>
-          <p:cNvPr id="168" name="Text 166"/>
+          <p:cNvPr id="168" name="Text 163"/>
           <p:cNvSpPr txBox="1"/>
           <p:nvPr/>
         </p:nvSpPr>
@@ -6354,13 +6309,13 @@
       </p:sp>
       <p:sp>
         <p:nvSpPr>
-          <p:cNvPr id="169" name="Text 167"/>
-          <p:cNvSpPr txBox="1"/>
-          <p:nvPr/>
-        </p:nvSpPr>
-        <p:spPr>
-          <a:xfrm>
-            <a:off x="909828" y="7036308"/>
+          <p:cNvPr id="169" name="Text 164"/>
+          <p:cNvSpPr txBox="1"/>
+          <p:nvPr/>
+        </p:nvSpPr>
+        <p:spPr>
+          <a:xfrm>
+            <a:off x="900684" y="7036308"/>
             <a:ext cx="914400" cy="274320"/>
           </a:xfrm>
           <a:prstGeom prst="rect">
@@ -6370,7 +6325,7 @@
           <a:ln/>
         </p:spPr>
         <p:txBody>
-          <a:bodyPr wrap="square" lIns="0" tIns="0" rIns="0" bIns="0" rtlCol="0" anchor="ctr"/>
+          <a:bodyPr wrap="none" lIns="0" tIns="0" rIns="0" bIns="0" rtlCol="0" anchor="ctr"/>
           <a:lstStyle/>
           <a:p>
             <a:pPr indent="0" marL="0">
@@ -6393,7 +6348,7 @@
       </p:sp>
       <p:sp>
         <p:nvSpPr>
-          <p:cNvPr id="170" name="Text 168"/>
+          <p:cNvPr id="170" name="Text 165"/>
           <p:cNvSpPr txBox="1"/>
           <p:nvPr/>
         </p:nvSpPr>
@@ -6432,7 +6387,7 @@
       </p:sp>
       <p:sp>
         <p:nvSpPr>
-          <p:cNvPr id="171" name="Shape 169"/>
+          <p:cNvPr id="171" name="Shape 166"/>
           <p:cNvSpPr/>
           <p:nvPr/>
         </p:nvSpPr>
@@ -6457,7 +6412,7 @@
       </p:sp>
       <p:sp>
         <p:nvSpPr>
-          <p:cNvPr id="172" name="Shape 170"/>
+          <p:cNvPr id="172" name="Shape 167"/>
           <p:cNvSpPr/>
           <p:nvPr/>
         </p:nvSpPr>
@@ -6482,7 +6437,7 @@
       </p:sp>
       <p:sp>
         <p:nvSpPr>
-          <p:cNvPr id="173" name="Text 171"/>
+          <p:cNvPr id="173" name="Text 168"/>
           <p:cNvSpPr txBox="1"/>
           <p:nvPr/>
         </p:nvSpPr>
@@ -6521,7 +6476,7 @@
       </p:sp>
       <p:sp>
         <p:nvSpPr>
-          <p:cNvPr id="174" name="Shape 172"/>
+          <p:cNvPr id="174" name="Shape 169"/>
           <p:cNvSpPr/>
           <p:nvPr/>
         </p:nvSpPr>
@@ -6546,7 +6501,7 @@
       </p:sp>
       <p:sp>
         <p:nvSpPr>
-          <p:cNvPr id="175" name="Text 173"/>
+          <p:cNvPr id="175" name="Text 170"/>
           <p:cNvSpPr txBox="1"/>
           <p:nvPr/>
         </p:nvSpPr>
@@ -6585,7 +6540,7 @@
       </p:sp>
       <p:sp>
         <p:nvSpPr>
-          <p:cNvPr id="176" name="Text 174"/>
+          <p:cNvPr id="176" name="Text 171"/>
           <p:cNvSpPr txBox="1"/>
           <p:nvPr/>
         </p:nvSpPr>
@@ -6624,7 +6579,7 @@
       </p:sp>
       <p:sp>
         <p:nvSpPr>
-          <p:cNvPr id="177" name="Text 175"/>
+          <p:cNvPr id="177" name="Text 172"/>
           <p:cNvSpPr txBox="1"/>
           <p:nvPr/>
         </p:nvSpPr>
@@ -6663,7 +6618,7 @@
       </p:sp>
       <p:sp>
         <p:nvSpPr>
-          <p:cNvPr id="178" name="Shape 176"/>
+          <p:cNvPr id="178" name="Shape 173"/>
           <p:cNvSpPr/>
           <p:nvPr/>
         </p:nvSpPr>
@@ -6688,7 +6643,7 @@
       </p:sp>
       <p:sp>
         <p:nvSpPr>
-          <p:cNvPr id="179" name="Shape 177"/>
+          <p:cNvPr id="179" name="Shape 174"/>
           <p:cNvSpPr/>
           <p:nvPr/>
         </p:nvSpPr>
@@ -6713,7 +6668,7 @@
       </p:sp>
       <p:sp>
         <p:nvSpPr>
-          <p:cNvPr id="180" name="Text 178"/>
+          <p:cNvPr id="180" name="Text 175"/>
           <p:cNvSpPr txBox="1"/>
           <p:nvPr/>
         </p:nvSpPr>
@@ -6752,7 +6707,7 @@
       </p:sp>
       <p:sp>
         <p:nvSpPr>
-          <p:cNvPr id="181" name="Text 179"/>
+          <p:cNvPr id="181" name="Text 176"/>
           <p:cNvSpPr txBox="1"/>
           <p:nvPr/>
         </p:nvSpPr>
@@ -6791,7 +6746,7 @@
       </p:sp>
       <p:sp>
         <p:nvSpPr>
-          <p:cNvPr id="182" name="Text 180"/>
+          <p:cNvPr id="182" name="Text 177"/>
           <p:cNvSpPr txBox="1"/>
           <p:nvPr/>
         </p:nvSpPr>
@@ -6830,7 +6785,7 @@
       </p:sp>
       <p:sp>
         <p:nvSpPr>
-          <p:cNvPr id="183" name="Shape 181"/>
+          <p:cNvPr id="183" name="Shape 178"/>
           <p:cNvSpPr/>
           <p:nvPr/>
         </p:nvSpPr>
@@ -6855,7 +6810,7 @@
       </p:sp>
       <p:sp>
         <p:nvSpPr>
-          <p:cNvPr id="184" name="Text 182"/>
+          <p:cNvPr id="184" name="Text 179"/>
           <p:cNvSpPr txBox="1"/>
           <p:nvPr/>
         </p:nvSpPr>
@@ -6894,7 +6849,7 @@
       </p:sp>
       <p:sp>
         <p:nvSpPr>
-          <p:cNvPr id="185" name="Shape 183"/>
+          <p:cNvPr id="185" name="Shape 180"/>
           <p:cNvSpPr/>
           <p:nvPr/>
         </p:nvSpPr>
@@ -6919,7 +6874,7 @@
       </p:sp>
       <p:sp>
         <p:nvSpPr>
-          <p:cNvPr id="186" name="Text 184"/>
+          <p:cNvPr id="186" name="Text 181"/>
           <p:cNvSpPr txBox="1"/>
           <p:nvPr/>
         </p:nvSpPr>
@@ -6958,7 +6913,7 @@
       </p:sp>
       <p:sp>
         <p:nvSpPr>
-          <p:cNvPr id="187" name="Text 185"/>
+          <p:cNvPr id="187" name="Text 182"/>
           <p:cNvSpPr txBox="1"/>
           <p:nvPr/>
         </p:nvSpPr>
@@ -6997,7 +6952,7 @@
       </p:sp>
       <p:sp>
         <p:nvSpPr>
-          <p:cNvPr id="188" name="Text 186"/>
+          <p:cNvPr id="188" name="Text 183"/>
           <p:cNvSpPr txBox="1"/>
           <p:nvPr/>
         </p:nvSpPr>
@@ -7036,7 +6991,7 @@
       </p:sp>
       <p:sp>
         <p:nvSpPr>
-          <p:cNvPr id="189" name="Text 187"/>
+          <p:cNvPr id="189" name="Text 184"/>
           <p:cNvSpPr txBox="1"/>
           <p:nvPr/>
         </p:nvSpPr>
@@ -7075,7 +7030,7 @@
       </p:sp>
       <p:sp>
         <p:nvSpPr>
-          <p:cNvPr id="190" name="Shape 188"/>
+          <p:cNvPr id="190" name="Shape 185"/>
           <p:cNvSpPr/>
           <p:nvPr/>
         </p:nvSpPr>
@@ -7100,7 +7055,7 @@
       </p:sp>
       <p:sp>
         <p:nvSpPr>
-          <p:cNvPr id="191" name="Shape 189"/>
+          <p:cNvPr id="191" name="Shape 186"/>
           <p:cNvSpPr/>
           <p:nvPr/>
         </p:nvSpPr>
@@ -7125,7 +7080,7 @@
       </p:sp>
       <p:sp>
         <p:nvSpPr>
-          <p:cNvPr id="192" name="Shape 190"/>
+          <p:cNvPr id="192" name="Shape 187"/>
           <p:cNvSpPr/>
           <p:nvPr/>
         </p:nvSpPr>
@@ -7152,7 +7107,7 @@
       </p:sp>
       <p:sp>
         <p:nvSpPr>
-          <p:cNvPr id="193" name="Shape 191"/>
+          <p:cNvPr id="193" name="Shape 188"/>
           <p:cNvSpPr/>
           <p:nvPr/>
         </p:nvSpPr>
@@ -7177,7 +7132,7 @@
       </p:sp>
       <p:sp>
         <p:nvSpPr>
-          <p:cNvPr id="194" name="Shape 192"/>
+          <p:cNvPr id="194" name="Shape 189"/>
           <p:cNvSpPr/>
           <p:nvPr/>
         </p:nvSpPr>
@@ -7204,7 +7159,7 @@
       </p:sp>
       <p:sp>
         <p:nvSpPr>
-          <p:cNvPr id="195" name="Text 193"/>
+          <p:cNvPr id="195" name="Text 190"/>
           <p:cNvSpPr txBox="1"/>
           <p:nvPr/>
         </p:nvSpPr>
@@ -7243,13 +7198,13 @@
       </p:sp>
       <p:sp>
         <p:nvSpPr>
-          <p:cNvPr id="196" name="Text 194"/>
-          <p:cNvSpPr txBox="1"/>
-          <p:nvPr/>
-        </p:nvSpPr>
-        <p:spPr>
-          <a:xfrm>
-            <a:off x="3177540" y="7036308"/>
+          <p:cNvPr id="196" name="Text 191"/>
+          <p:cNvSpPr txBox="1"/>
+          <p:nvPr/>
+        </p:nvSpPr>
+        <p:spPr>
+          <a:xfrm>
+            <a:off x="3168396" y="7036308"/>
             <a:ext cx="914400" cy="274320"/>
           </a:xfrm>
           <a:prstGeom prst="rect">
@@ -7259,7 +7214,7 @@
           <a:ln/>
         </p:spPr>
         <p:txBody>
-          <a:bodyPr wrap="square" lIns="0" tIns="0" rIns="0" bIns="0" rtlCol="0" anchor="ctr"/>
+          <a:bodyPr wrap="none" lIns="0" tIns="0" rIns="0" bIns="0" rtlCol="0" anchor="ctr"/>
           <a:lstStyle/>
           <a:p>
             <a:pPr indent="0" marL="0">
@@ -7282,7 +7237,7 @@
       </p:sp>
       <p:sp>
         <p:nvSpPr>
-          <p:cNvPr id="197" name="Text 195"/>
+          <p:cNvPr id="197" name="Text 192"/>
           <p:cNvSpPr txBox="1"/>
           <p:nvPr/>
         </p:nvSpPr>
@@ -7321,7 +7276,7 @@
       </p:sp>
       <p:sp>
         <p:nvSpPr>
-          <p:cNvPr id="198" name="Shape 196"/>
+          <p:cNvPr id="198" name="Shape 193"/>
           <p:cNvSpPr/>
           <p:nvPr/>
         </p:nvSpPr>
@@ -7346,7 +7301,7 @@
       </p:sp>
       <p:sp>
         <p:nvSpPr>
-          <p:cNvPr id="199" name="Shape 197"/>
+          <p:cNvPr id="199" name="Shape 194"/>
           <p:cNvSpPr/>
           <p:nvPr/>
         </p:nvSpPr>
@@ -7371,7 +7326,7 @@
       </p:sp>
       <p:sp>
         <p:nvSpPr>
-          <p:cNvPr id="200" name="Text 198"/>
+          <p:cNvPr id="200" name="Text 195"/>
           <p:cNvSpPr txBox="1"/>
           <p:nvPr/>
         </p:nvSpPr>
@@ -7410,7 +7365,7 @@
       </p:sp>
       <p:sp>
         <p:nvSpPr>
-          <p:cNvPr id="201" name="Shape 199"/>
+          <p:cNvPr id="201" name="Shape 196"/>
           <p:cNvSpPr/>
           <p:nvPr/>
         </p:nvSpPr>
@@ -7435,7 +7390,7 @@
       </p:sp>
       <p:sp>
         <p:nvSpPr>
-          <p:cNvPr id="202" name="Text 200"/>
+          <p:cNvPr id="202" name="Text 197"/>
           <p:cNvSpPr txBox="1"/>
           <p:nvPr/>
         </p:nvSpPr>
@@ -7474,7 +7429,7 @@
       </p:sp>
       <p:sp>
         <p:nvSpPr>
-          <p:cNvPr id="203" name="Text 201"/>
+          <p:cNvPr id="203" name="Text 198"/>
           <p:cNvSpPr txBox="1"/>
           <p:nvPr/>
         </p:nvSpPr>
@@ -7513,7 +7468,7 @@
       </p:sp>
       <p:sp>
         <p:nvSpPr>
-          <p:cNvPr id="204" name="Text 202"/>
+          <p:cNvPr id="204" name="Text 199"/>
           <p:cNvSpPr txBox="1"/>
           <p:nvPr/>
         </p:nvSpPr>
@@ -7552,7 +7507,7 @@
       </p:sp>
       <p:sp>
         <p:nvSpPr>
-          <p:cNvPr id="205" name="Shape 203"/>
+          <p:cNvPr id="205" name="Shape 200"/>
           <p:cNvSpPr/>
           <p:nvPr/>
         </p:nvSpPr>
@@ -7577,7 +7532,7 @@
       </p:sp>
       <p:sp>
         <p:nvSpPr>
-          <p:cNvPr id="206" name="Shape 204"/>
+          <p:cNvPr id="206" name="Shape 201"/>
           <p:cNvSpPr/>
           <p:nvPr/>
         </p:nvSpPr>
@@ -7602,7 +7557,7 @@
       </p:sp>
       <p:sp>
         <p:nvSpPr>
-          <p:cNvPr id="207" name="Text 205"/>
+          <p:cNvPr id="207" name="Text 202"/>
           <p:cNvSpPr txBox="1"/>
           <p:nvPr/>
         </p:nvSpPr>
@@ -7641,7 +7596,7 @@
       </p:sp>
       <p:sp>
         <p:nvSpPr>
-          <p:cNvPr id="208" name="Text 206"/>
+          <p:cNvPr id="208" name="Text 203"/>
           <p:cNvSpPr txBox="1"/>
           <p:nvPr/>
         </p:nvSpPr>
@@ -7680,7 +7635,7 @@
       </p:sp>
       <p:sp>
         <p:nvSpPr>
-          <p:cNvPr id="209" name="Text 207"/>
+          <p:cNvPr id="209" name="Text 204"/>
           <p:cNvSpPr txBox="1"/>
           <p:nvPr/>
         </p:nvSpPr>
@@ -7719,7 +7674,7 @@
       </p:sp>
       <p:sp>
         <p:nvSpPr>
-          <p:cNvPr id="210" name="Shape 208"/>
+          <p:cNvPr id="210" name="Shape 205"/>
           <p:cNvSpPr/>
           <p:nvPr/>
         </p:nvSpPr>
@@ -7744,7 +7699,7 @@
       </p:sp>
       <p:sp>
         <p:nvSpPr>
-          <p:cNvPr id="211" name="Text 209"/>
+          <p:cNvPr id="211" name="Text 206"/>
           <p:cNvSpPr txBox="1"/>
           <p:nvPr/>
         </p:nvSpPr>
@@ -7783,7 +7738,7 @@
       </p:sp>
       <p:sp>
         <p:nvSpPr>
-          <p:cNvPr id="212" name="Shape 210"/>
+          <p:cNvPr id="212" name="Shape 207"/>
           <p:cNvSpPr/>
           <p:nvPr/>
         </p:nvSpPr>
@@ -7808,7 +7763,7 @@
       </p:sp>
       <p:sp>
         <p:nvSpPr>
-          <p:cNvPr id="213" name="Text 211"/>
+          <p:cNvPr id="213" name="Text 208"/>
           <p:cNvSpPr txBox="1"/>
           <p:nvPr/>
         </p:nvSpPr>
@@ -7847,7 +7802,7 @@
       </p:sp>
       <p:sp>
         <p:nvSpPr>
-          <p:cNvPr id="214" name="Text 212"/>
+          <p:cNvPr id="214" name="Text 209"/>
           <p:cNvSpPr txBox="1"/>
           <p:nvPr/>
         </p:nvSpPr>
@@ -7886,7 +7841,7 @@
       </p:sp>
       <p:sp>
         <p:nvSpPr>
-          <p:cNvPr id="215" name="Text 213"/>
+          <p:cNvPr id="215" name="Text 210"/>
           <p:cNvSpPr txBox="1"/>
           <p:nvPr/>
         </p:nvSpPr>
@@ -7925,7 +7880,7 @@
       </p:sp>
       <p:sp>
         <p:nvSpPr>
-          <p:cNvPr id="216" name="Text 214"/>
+          <p:cNvPr id="216" name="Text 211"/>
           <p:cNvSpPr txBox="1"/>
           <p:nvPr/>
         </p:nvSpPr>
@@ -7964,7 +7919,7 @@
       </p:sp>
       <p:sp>
         <p:nvSpPr>
-          <p:cNvPr id="217" name="Shape 215"/>
+          <p:cNvPr id="217" name="Shape 212"/>
           <p:cNvSpPr/>
           <p:nvPr/>
         </p:nvSpPr>
@@ -7989,7 +7944,7 @@
       </p:sp>
       <p:sp>
         <p:nvSpPr>
-          <p:cNvPr id="218" name="Shape 216"/>
+          <p:cNvPr id="218" name="Shape 213"/>
           <p:cNvSpPr/>
           <p:nvPr/>
         </p:nvSpPr>
@@ -8014,7 +7969,7 @@
       </p:sp>
       <p:sp>
         <p:nvSpPr>
-          <p:cNvPr id="219" name="Shape 217"/>
+          <p:cNvPr id="219" name="Shape 214"/>
           <p:cNvSpPr/>
           <p:nvPr/>
         </p:nvSpPr>
@@ -8041,7 +7996,7 @@
       </p:sp>
       <p:sp>
         <p:nvSpPr>
-          <p:cNvPr id="220" name="Shape 218"/>
+          <p:cNvPr id="220" name="Shape 215"/>
           <p:cNvSpPr/>
           <p:nvPr/>
         </p:nvSpPr>
@@ -8066,7 +8021,7 @@
       </p:sp>
       <p:sp>
         <p:nvSpPr>
-          <p:cNvPr id="221" name="Shape 219"/>
+          <p:cNvPr id="221" name="Shape 216"/>
           <p:cNvSpPr/>
           <p:nvPr/>
         </p:nvSpPr>
@@ -8093,7 +8048,7 @@
       </p:sp>
       <p:sp>
         <p:nvSpPr>
-          <p:cNvPr id="222" name="Text 220"/>
+          <p:cNvPr id="222" name="Text 217"/>
           <p:cNvSpPr txBox="1"/>
           <p:nvPr/>
         </p:nvSpPr>
@@ -8132,13 +8087,13 @@
       </p:sp>
       <p:sp>
         <p:nvSpPr>
-          <p:cNvPr id="223" name="Text 221"/>
-          <p:cNvSpPr txBox="1"/>
-          <p:nvPr/>
-        </p:nvSpPr>
-        <p:spPr>
-          <a:xfrm>
-            <a:off x="5445252" y="7036308"/>
+          <p:cNvPr id="223" name="Text 218"/>
+          <p:cNvSpPr txBox="1"/>
+          <p:nvPr/>
+        </p:nvSpPr>
+        <p:spPr>
+          <a:xfrm>
+            <a:off x="5436108" y="7036308"/>
             <a:ext cx="914400" cy="274320"/>
           </a:xfrm>
           <a:prstGeom prst="rect">
@@ -8148,7 +8103,7 @@
           <a:ln/>
         </p:spPr>
         <p:txBody>
-          <a:bodyPr wrap="square" lIns="0" tIns="0" rIns="0" bIns="0" rtlCol="0" anchor="ctr"/>
+          <a:bodyPr wrap="none" lIns="0" tIns="0" rIns="0" bIns="0" rtlCol="0" anchor="ctr"/>
           <a:lstStyle/>
           <a:p>
             <a:pPr indent="0" marL="0">
@@ -8171,7 +8126,7 @@
       </p:sp>
       <p:sp>
         <p:nvSpPr>
-          <p:cNvPr id="224" name="Text 222"/>
+          <p:cNvPr id="224" name="Text 219"/>
           <p:cNvSpPr txBox="1"/>
           <p:nvPr/>
         </p:nvSpPr>
@@ -8210,7 +8165,7 @@
       </p:sp>
       <p:sp>
         <p:nvSpPr>
-          <p:cNvPr id="225" name="Shape 223"/>
+          <p:cNvPr id="225" name="Shape 220"/>
           <p:cNvSpPr/>
           <p:nvPr/>
         </p:nvSpPr>
@@ -8235,7 +8190,7 @@
       </p:sp>
       <p:sp>
         <p:nvSpPr>
-          <p:cNvPr id="226" name="Shape 224"/>
+          <p:cNvPr id="226" name="Shape 221"/>
           <p:cNvSpPr/>
           <p:nvPr/>
         </p:nvSpPr>
@@ -8260,7 +8215,7 @@
       </p:sp>
       <p:sp>
         <p:nvSpPr>
-          <p:cNvPr id="227" name="Text 225"/>
+          <p:cNvPr id="227" name="Text 222"/>
           <p:cNvSpPr txBox="1"/>
           <p:nvPr/>
         </p:nvSpPr>
@@ -8299,7 +8254,7 @@
       </p:sp>
       <p:sp>
         <p:nvSpPr>
-          <p:cNvPr id="228" name="Shape 226"/>
+          <p:cNvPr id="228" name="Shape 223"/>
           <p:cNvSpPr/>
           <p:nvPr/>
         </p:nvSpPr>
@@ -8324,7 +8279,7 @@
       </p:sp>
       <p:sp>
         <p:nvSpPr>
-          <p:cNvPr id="229" name="Text 227"/>
+          <p:cNvPr id="229" name="Text 224"/>
           <p:cNvSpPr txBox="1"/>
           <p:nvPr/>
         </p:nvSpPr>
@@ -8363,7 +8318,7 @@
       </p:sp>
       <p:sp>
         <p:nvSpPr>
-          <p:cNvPr id="230" name="Text 228"/>
+          <p:cNvPr id="230" name="Text 225"/>
           <p:cNvSpPr txBox="1"/>
           <p:nvPr/>
         </p:nvSpPr>
@@ -8402,7 +8357,7 @@
       </p:sp>
       <p:sp>
         <p:nvSpPr>
-          <p:cNvPr id="231" name="Text 229"/>
+          <p:cNvPr id="231" name="Text 226"/>
           <p:cNvSpPr txBox="1"/>
           <p:nvPr/>
         </p:nvSpPr>
@@ -8441,7 +8396,7 @@
       </p:sp>
       <p:sp>
         <p:nvSpPr>
-          <p:cNvPr id="232" name="Shape 230"/>
+          <p:cNvPr id="232" name="Shape 227"/>
           <p:cNvSpPr/>
           <p:nvPr/>
         </p:nvSpPr>
@@ -8466,7 +8421,7 @@
       </p:sp>
       <p:sp>
         <p:nvSpPr>
-          <p:cNvPr id="233" name="Shape 231"/>
+          <p:cNvPr id="233" name="Shape 228"/>
           <p:cNvSpPr/>
           <p:nvPr/>
         </p:nvSpPr>
@@ -8491,7 +8446,7 @@
       </p:sp>
       <p:sp>
         <p:nvSpPr>
-          <p:cNvPr id="234" name="Text 232"/>
+          <p:cNvPr id="234" name="Text 229"/>
           <p:cNvSpPr txBox="1"/>
           <p:nvPr/>
         </p:nvSpPr>
@@ -8530,7 +8485,7 @@
       </p:sp>
       <p:sp>
         <p:nvSpPr>
-          <p:cNvPr id="235" name="Text 233"/>
+          <p:cNvPr id="235" name="Text 230"/>
           <p:cNvSpPr txBox="1"/>
           <p:nvPr/>
         </p:nvSpPr>
@@ -8569,7 +8524,7 @@
       </p:sp>
       <p:sp>
         <p:nvSpPr>
-          <p:cNvPr id="236" name="Text 234"/>
+          <p:cNvPr id="236" name="Text 231"/>
           <p:cNvSpPr txBox="1"/>
           <p:nvPr/>
         </p:nvSpPr>
@@ -8608,7 +8563,7 @@
       </p:sp>
       <p:sp>
         <p:nvSpPr>
-          <p:cNvPr id="237" name="Shape 235"/>
+          <p:cNvPr id="237" name="Shape 232"/>
           <p:cNvSpPr/>
           <p:nvPr/>
         </p:nvSpPr>
@@ -8633,7 +8588,7 @@
       </p:sp>
       <p:sp>
         <p:nvSpPr>
-          <p:cNvPr id="238" name="Text 236"/>
+          <p:cNvPr id="238" name="Text 233"/>
           <p:cNvSpPr txBox="1"/>
           <p:nvPr/>
         </p:nvSpPr>
@@ -8672,7 +8627,7 @@
       </p:sp>
       <p:sp>
         <p:nvSpPr>
-          <p:cNvPr id="239" name="Shape 237"/>
+          <p:cNvPr id="239" name="Shape 234"/>
           <p:cNvSpPr/>
           <p:nvPr/>
         </p:nvSpPr>
@@ -8697,7 +8652,7 @@
       </p:sp>
       <p:sp>
         <p:nvSpPr>
-          <p:cNvPr id="240" name="Text 238"/>
+          <p:cNvPr id="240" name="Text 235"/>
           <p:cNvSpPr txBox="1"/>
           <p:nvPr/>
         </p:nvSpPr>
@@ -8736,7 +8691,7 @@
       </p:sp>
       <p:sp>
         <p:nvSpPr>
-          <p:cNvPr id="241" name="Text 239"/>
+          <p:cNvPr id="241" name="Text 236"/>
           <p:cNvSpPr txBox="1"/>
           <p:nvPr/>
         </p:nvSpPr>
@@ -8775,7 +8730,7 @@
       </p:sp>
       <p:sp>
         <p:nvSpPr>
-          <p:cNvPr id="242" name="Text 240"/>
+          <p:cNvPr id="242" name="Text 237"/>
           <p:cNvSpPr txBox="1"/>
           <p:nvPr/>
         </p:nvSpPr>
@@ -8814,7 +8769,7 @@
       </p:sp>
       <p:sp>
         <p:nvSpPr>
-          <p:cNvPr id="243" name="Text 241"/>
+          <p:cNvPr id="243" name="Text 238"/>
           <p:cNvSpPr txBox="1"/>
           <p:nvPr/>
         </p:nvSpPr>
@@ -8853,7 +8808,7 @@
       </p:sp>
       <p:sp>
         <p:nvSpPr>
-          <p:cNvPr id="244" name="Shape 242"/>
+          <p:cNvPr id="244" name="Shape 239"/>
           <p:cNvSpPr/>
           <p:nvPr/>
         </p:nvSpPr>
